--- a/preview_v7/cn/l-cn-bx-u8-2.pptx
+++ b/preview_v7/cn/l-cn-bx-u8-2.pptx
@@ -3142,55 +3142,14 @@
       </p:sp>
       <p:sp>
         <p:nvSpPr>
-          <p:cNvPr id="3" name="TextBox 2"/>
-          <p:cNvSpPr txBox="1"/>
-          <p:nvPr/>
-        </p:nvSpPr>
-        <p:spPr>
-          <a:xfrm>
-            <a:off x="640080" y="640080"/>
-            <a:ext cx="10911535" cy="502920"/>
-          </a:xfrm>
-          <a:prstGeom prst="rect">
-            <a:avLst/>
-          </a:prstGeom>
-          <a:noFill/>
-        </p:spPr>
-        <p:txBody>
-          <a:bodyPr wrap="square" anchor="t" lIns="0" rIns="0" tIns="0" bIns="0">
-            <a:spAutoFit/>
-          </a:bodyPr>
-          <a:lstStyle/>
-          <a:p>
-            <a:pPr algn="l">
-              <a:spcAft>
-                <a:spcPts val="0"/>
-              </a:spcAft>
-            </a:pPr>
-            <a:r>
-              <a:rPr sz="1200" b="1">
-                <a:solidFill>
-                  <a:srgbClr val="B23A2A"/>
-                </a:solidFill>
-                <a:latin typeface="微软雅黑"/>
-                <a:ea typeface="微软雅黑"/>
-                <a:cs typeface="微软雅黑"/>
-              </a:rPr>
-              <a:t>语文 · 必修下册 · 第8单元 思辨性阅读与表达（古代说理文）</a:t>
-            </a:r>
-          </a:p>
-        </p:txBody>
-      </p:sp>
-      <p:sp>
-        <p:nvSpPr>
-          <p:cNvPr id="4" name="Rectangle 3"/>
+          <p:cNvPr id="3" name="Rectangle 2"/>
           <p:cNvSpPr/>
           <p:nvPr/>
         </p:nvSpPr>
         <p:spPr>
           <a:xfrm>
-            <a:off x="640080" y="1207008"/>
-            <a:ext cx="822960" cy="30480"/>
+            <a:off x="0" y="0"/>
+            <a:ext cx="292608" cy="6858000"/>
           </a:xfrm>
           <a:prstGeom prst="rect">
             <a:avLst/>
@@ -3227,14 +3186,14 @@
       </p:sp>
       <p:sp>
         <p:nvSpPr>
-          <p:cNvPr id="5" name="TextBox 4"/>
+          <p:cNvPr id="4" name="TextBox 3"/>
           <p:cNvSpPr txBox="1"/>
           <p:nvPr/>
         </p:nvSpPr>
         <p:spPr>
           <a:xfrm>
-            <a:off x="640080" y="1737360"/>
-            <a:ext cx="10911535" cy="2011680"/>
+            <a:off x="749808" y="640080"/>
+            <a:ext cx="6400800" cy="365760"/>
           </a:xfrm>
           <a:prstGeom prst="rect">
             <a:avLst/>
@@ -3248,71 +3207,34 @@
           <a:lstStyle/>
           <a:p>
             <a:pPr algn="l">
-              <a:lnSpc>
-                <a:spcPct val="115000"/>
-              </a:lnSpc>
+              <a:spcAft>
+                <a:spcPts val="0"/>
+              </a:spcAft>
             </a:pPr>
             <a:r>
-              <a:rPr sz="4000" b="1">
-                <a:solidFill>
-                  <a:srgbClr val="1C2A33"/>
-                </a:solidFill>
-                <a:latin typeface="楷体"/>
-                <a:ea typeface="楷体"/>
-                <a:cs typeface="楷体"/>
-              </a:rPr>
-              <a:t>答司马谏议书 精读——驳论艺术与变法立场</a:t>
-            </a:r>
-          </a:p>
-        </p:txBody>
-      </p:sp>
-      <p:sp>
-        <p:nvSpPr>
-          <p:cNvPr id="6" name="TextBox 5"/>
-          <p:cNvSpPr txBox="1"/>
-          <p:nvPr/>
-        </p:nvSpPr>
-        <p:spPr>
-          <a:xfrm>
-            <a:off x="640080" y="3840480"/>
-            <a:ext cx="10911535" cy="457200"/>
-          </a:xfrm>
-          <a:prstGeom prst="rect">
-            <a:avLst/>
-          </a:prstGeom>
-          <a:noFill/>
-        </p:spPr>
-        <p:txBody>
-          <a:bodyPr wrap="square" anchor="t" lIns="0" rIns="0" tIns="0" bIns="0">
-            <a:spAutoFit/>
-          </a:bodyPr>
-          <a:lstStyle/>
-          <a:p>
-            <a:pPr algn="l"/>
-            <a:r>
-              <a:rPr sz="1700" b="1">
-                <a:solidFill>
-                  <a:srgbClr val="B23A2A"/>
+              <a:rPr sz="1300" b="1">
+                <a:solidFill>
+                  <a:srgbClr val="C8A86B"/>
                 </a:solidFill>
                 <a:latin typeface="微软雅黑"/>
                 <a:ea typeface="微软雅黑"/>
                 <a:cs typeface="微软雅黑"/>
               </a:rPr>
-              <a:t>课文精读  ·  第2课时  ·  45分钟</a:t>
-            </a:r>
-          </a:p>
-        </p:txBody>
-      </p:sp>
-      <p:sp>
-        <p:nvSpPr>
-          <p:cNvPr id="7" name="Rectangle 6"/>
+              <a:t>必修下册 · 第8单元 · 思辨性阅读与表达（古代说理文）</a:t>
+            </a:r>
+          </a:p>
+        </p:txBody>
+      </p:sp>
+      <p:sp>
+        <p:nvSpPr>
+          <p:cNvPr id="5" name="Rectangle 4"/>
           <p:cNvSpPr/>
           <p:nvPr/>
         </p:nvSpPr>
         <p:spPr>
           <a:xfrm>
-            <a:off x="640080" y="5394960"/>
-            <a:ext cx="2011680" cy="33020"/>
+            <a:off x="749808" y="1097280"/>
+            <a:ext cx="822960" cy="30480"/>
           </a:xfrm>
           <a:prstGeom prst="rect">
             <a:avLst/>
@@ -3349,14 +3271,14 @@
       </p:sp>
       <p:sp>
         <p:nvSpPr>
-          <p:cNvPr id="8" name="TextBox 7"/>
+          <p:cNvPr id="6" name="TextBox 5"/>
           <p:cNvSpPr txBox="1"/>
           <p:nvPr/>
         </p:nvSpPr>
         <p:spPr>
           <a:xfrm>
-            <a:off x="640080" y="5623560"/>
-            <a:ext cx="10911535" cy="548640"/>
+            <a:off x="640080" y="1691640"/>
+            <a:ext cx="10881360" cy="1737360"/>
           </a:xfrm>
           <a:prstGeom prst="rect">
             <a:avLst/>
@@ -3369,9 +3291,135 @@
           </a:bodyPr>
           <a:lstStyle/>
           <a:p>
+            <a:pPr algn="l">
+              <a:lnSpc>
+                <a:spcPct val="118000"/>
+              </a:lnSpc>
+            </a:pPr>
+            <a:r>
+              <a:rPr sz="3600" b="1">
+                <a:solidFill>
+                  <a:srgbClr val="1C2A33"/>
+                </a:solidFill>
+                <a:latin typeface="楷体"/>
+                <a:ea typeface="楷体"/>
+                <a:cs typeface="楷体"/>
+              </a:rPr>
+              <a:t>答司马谏议书 精读——驳论艺术与变法立场</a:t>
+            </a:r>
+          </a:p>
+        </p:txBody>
+      </p:sp>
+      <p:sp>
+        <p:nvSpPr>
+          <p:cNvPr id="7" name="Rectangle 6"/>
+          <p:cNvSpPr/>
+          <p:nvPr/>
+        </p:nvSpPr>
+        <p:spPr>
+          <a:xfrm>
+            <a:off x="640080" y="3246120"/>
+            <a:ext cx="822960" cy="30480"/>
+          </a:xfrm>
+          <a:prstGeom prst="rect">
+            <a:avLst/>
+          </a:prstGeom>
+          <a:solidFill>
+            <a:srgbClr val="C8A86B"/>
+          </a:solidFill>
+          <a:ln>
+            <a:noFill/>
+          </a:ln>
+          <a:effectLst/>
+        </p:spPr>
+        <p:style>
+          <a:lnRef idx="1">
+            <a:schemeClr val="accent1"/>
+          </a:lnRef>
+          <a:fillRef idx="3">
+            <a:schemeClr val="accent1"/>
+          </a:fillRef>
+          <a:effectRef idx="2">
+            <a:schemeClr val="accent1"/>
+          </a:effectRef>
+          <a:fontRef idx="minor">
+            <a:schemeClr val="lt1"/>
+          </a:fontRef>
+        </p:style>
+        <p:txBody>
+          <a:bodyPr rtlCol="0" anchor="ctr"/>
+          <a:lstStyle/>
+          <a:p>
+            <a:pPr algn="ctr"/>
+          </a:p>
+        </p:txBody>
+      </p:sp>
+      <p:sp>
+        <p:nvSpPr>
+          <p:cNvPr id="8" name="TextBox 7"/>
+          <p:cNvSpPr txBox="1"/>
+          <p:nvPr/>
+        </p:nvSpPr>
+        <p:spPr>
+          <a:xfrm>
+            <a:off x="640080" y="3456432"/>
+            <a:ext cx="10607040" cy="1143000"/>
+          </a:xfrm>
+          <a:prstGeom prst="rect">
+            <a:avLst/>
+          </a:prstGeom>
+          <a:noFill/>
+        </p:spPr>
+        <p:txBody>
+          <a:bodyPr wrap="square" anchor="t" lIns="0" rIns="0" tIns="0" bIns="0">
+            <a:spAutoFit/>
+          </a:bodyPr>
+          <a:lstStyle/>
+          <a:p>
+            <a:pPr algn="l">
+              <a:lnSpc>
+                <a:spcPct val="145000"/>
+              </a:lnSpc>
+            </a:pPr>
+            <a:r>
+              <a:rPr sz="1600" b="0">
+                <a:solidFill>
+                  <a:srgbClr val="6B6258"/>
+                </a:solidFill>
+                <a:latin typeface="楷体"/>
+                <a:ea typeface="楷体"/>
+                <a:cs typeface="楷体"/>
+              </a:rPr>
+              <a:t>名实之辨、以守为攻——三百余字回信里的变法立场与驳论锋芒。</a:t>
+            </a:r>
+          </a:p>
+        </p:txBody>
+      </p:sp>
+      <p:sp>
+        <p:nvSpPr>
+          <p:cNvPr id="9" name="TextBox 8"/>
+          <p:cNvSpPr txBox="1"/>
+          <p:nvPr/>
+        </p:nvSpPr>
+        <p:spPr>
+          <a:xfrm>
+            <a:off x="640080" y="5806440"/>
+            <a:ext cx="10607040" cy="457200"/>
+          </a:xfrm>
+          <a:prstGeom prst="rect">
+            <a:avLst/>
+          </a:prstGeom>
+          <a:noFill/>
+        </p:spPr>
+        <p:txBody>
+          <a:bodyPr wrap="square" anchor="t" lIns="0" rIns="0" tIns="0" bIns="0">
+            <a:spAutoFit/>
+          </a:bodyPr>
+          <a:lstStyle/>
+          <a:p>
             <a:pPr algn="l"/>
             <a:r>
-              <a:rPr sz="1400" b="0">
+              <a:rPr sz="1300" b="0">
                 <a:solidFill>
                   <a:srgbClr val="6B6258"/>
                 </a:solidFill>
@@ -3379,14 +3427,14 @@
                 <a:ea typeface="微软雅黑"/>
                 <a:cs typeface="微软雅黑"/>
               </a:rPr>
-              <a:t>学习任务群：思辨性阅读与表达    |    年级：高一</a:t>
-            </a:r>
-          </a:p>
-        </p:txBody>
-      </p:sp>
-      <p:sp>
-        <p:nvSpPr>
-          <p:cNvPr id="9" name="TextBox 8"/>
+              <a:t>学生课堂版 · 第2课时 · 课文精读</a:t>
+            </a:r>
+          </a:p>
+        </p:txBody>
+      </p:sp>
+      <p:sp>
+        <p:nvSpPr>
+          <p:cNvPr id="10" name="TextBox 9"/>
           <p:cNvSpPr txBox="1"/>
           <p:nvPr/>
         </p:nvSpPr>
@@ -3519,7 +3567,7 @@
                 <a:ea typeface="微软雅黑"/>
                 <a:cs typeface="微软雅黑"/>
               </a:rPr>
-              <a:t>学习目标</a:t>
+              <a:t>本课目标</a:t>
             </a:r>
           </a:p>
         </p:txBody>
@@ -3570,14 +3618,51 @@
       </p:sp>
       <p:sp>
         <p:nvSpPr>
-          <p:cNvPr id="5" name="Rounded Rectangle 4"/>
+          <p:cNvPr id="5" name="TextBox 4"/>
+          <p:cNvSpPr txBox="1"/>
+          <p:nvPr/>
+        </p:nvSpPr>
+        <p:spPr>
+          <a:xfrm>
+            <a:off x="640080" y="1325880"/>
+            <a:ext cx="10911535" cy="548640"/>
+          </a:xfrm>
+          <a:prstGeom prst="rect">
+            <a:avLst/>
+          </a:prstGeom>
+          <a:noFill/>
+        </p:spPr>
+        <p:txBody>
+          <a:bodyPr wrap="square" anchor="t" lIns="0" rIns="0" tIns="0" bIns="0">
+            <a:spAutoFit/>
+          </a:bodyPr>
+          <a:lstStyle/>
+          <a:p>
+            <a:pPr algn="l"/>
+            <a:r>
+              <a:rPr sz="3000" b="1">
+                <a:solidFill>
+                  <a:srgbClr val="1C2A33"/>
+                </a:solidFill>
+                <a:latin typeface="楷体"/>
+                <a:ea typeface="楷体"/>
+                <a:cs typeface="楷体"/>
+              </a:rPr>
+              <a:t>四向学习目标</a:t>
+            </a:r>
+          </a:p>
+        </p:txBody>
+      </p:sp>
+      <p:sp>
+        <p:nvSpPr>
+          <p:cNvPr id="6" name="Rounded Rectangle 5"/>
           <p:cNvSpPr/>
           <p:nvPr/>
         </p:nvSpPr>
         <p:spPr>
           <a:xfrm>
-            <a:off x="640080" y="1417320"/>
-            <a:ext cx="5349240" cy="2057400"/>
+            <a:off x="640080" y="2057400"/>
+            <a:ext cx="5272887" cy="2103120"/>
           </a:xfrm>
           <a:prstGeom prst="roundRect">
             <a:avLst/>
@@ -3585,7 +3670,7 @@
           <a:solidFill>
             <a:srgbClr val="FFFFFF"/>
           </a:solidFill>
-          <a:ln w="22860">
+          <a:ln w="20320">
             <a:solidFill>
               <a:srgbClr val="B23A2A"/>
             </a:solidFill>
@@ -3616,13 +3701,13 @@
       </p:sp>
       <p:sp>
         <p:nvSpPr>
-          <p:cNvPr id="6" name="Oval 5"/>
+          <p:cNvPr id="7" name="Oval 6"/>
           <p:cNvSpPr/>
           <p:nvPr/>
         </p:nvSpPr>
         <p:spPr>
           <a:xfrm>
-            <a:off x="804672" y="1581912"/>
+            <a:off x="868680" y="2258568"/>
             <a:ext cx="457200" cy="457200"/>
           </a:xfrm>
           <a:prstGeom prst="ellipse">
@@ -3660,14 +3745,14 @@
       </p:sp>
       <p:sp>
         <p:nvSpPr>
-          <p:cNvPr id="7" name="TextBox 6"/>
+          <p:cNvPr id="8" name="TextBox 7"/>
           <p:cNvSpPr txBox="1"/>
           <p:nvPr/>
         </p:nvSpPr>
         <p:spPr>
           <a:xfrm>
-            <a:off x="804672" y="1636776"/>
-            <a:ext cx="457200" cy="384048"/>
+            <a:off x="868680" y="2313432"/>
+            <a:ext cx="457200" cy="365760"/>
           </a:xfrm>
           <a:prstGeom prst="rect">
             <a:avLst/>
@@ -3682,7 +3767,7 @@
           <a:p>
             <a:pPr algn="ctr"/>
             <a:r>
-              <a:rPr sz="1600" b="1">
+              <a:rPr sz="1800" b="1">
                 <a:solidFill>
                   <a:srgbClr val="FFFFFF"/>
                 </a:solidFill>
@@ -3697,14 +3782,14 @@
       </p:sp>
       <p:sp>
         <p:nvSpPr>
-          <p:cNvPr id="8" name="TextBox 7"/>
+          <p:cNvPr id="9" name="TextBox 8"/>
           <p:cNvSpPr txBox="1"/>
           <p:nvPr/>
         </p:nvSpPr>
         <p:spPr>
           <a:xfrm>
-            <a:off x="1371600" y="1527048"/>
-            <a:ext cx="4434840" cy="457200"/>
+            <a:off x="1463040" y="2276856"/>
+            <a:ext cx="4267047" cy="457200"/>
           </a:xfrm>
           <a:prstGeom prst="rect">
             <a:avLst/>
@@ -3717,35 +3802,31 @@
           </a:bodyPr>
           <a:lstStyle/>
           <a:p>
-            <a:pPr algn="l">
-              <a:lnSpc>
-                <a:spcPct val="110000"/>
-              </a:lnSpc>
-            </a:pPr>
-            <a:r>
-              <a:rPr sz="1600" b="1">
-                <a:solidFill>
-                  <a:srgbClr val="1C2A33"/>
+            <a:pPr algn="l"/>
+            <a:r>
+              <a:rPr sz="1700" b="1">
+                <a:solidFill>
+                  <a:srgbClr val="B23A2A"/>
                 </a:solidFill>
                 <a:latin typeface="微软雅黑"/>
                 <a:ea typeface="微软雅黑"/>
                 <a:cs typeface="微软雅黑"/>
               </a:rPr>
-              <a:t>目标</a:t>
-            </a:r>
-          </a:p>
-        </p:txBody>
-      </p:sp>
-      <p:sp>
-        <p:nvSpPr>
-          <p:cNvPr id="9" name="TextBox 8"/>
+              <a:t>语言能力</a:t>
+            </a:r>
+          </a:p>
+        </p:txBody>
+      </p:sp>
+      <p:sp>
+        <p:nvSpPr>
+          <p:cNvPr id="10" name="TextBox 9"/>
           <p:cNvSpPr txBox="1"/>
           <p:nvPr/>
         </p:nvSpPr>
         <p:spPr>
           <a:xfrm>
-            <a:off x="1371600" y="1965960"/>
-            <a:ext cx="4434840" cy="1417320"/>
+            <a:off x="914400" y="2880360"/>
+            <a:ext cx="4724247" cy="1143000"/>
           </a:xfrm>
           <a:prstGeom prst="rect">
             <a:avLst/>
@@ -3760,11 +3841,11 @@
           <a:p>
             <a:pPr algn="l">
               <a:lnSpc>
-                <a:spcPct val="128000"/>
+                <a:spcPct val="150000"/>
               </a:lnSpc>
             </a:pPr>
             <a:r>
-              <a:rPr sz="1400" b="0">
+              <a:rPr sz="1350" b="0">
                 <a:solidFill>
                   <a:srgbClr val="1C2A33"/>
                 </a:solidFill>
@@ -3772,21 +3853,21 @@
                 <a:ea typeface="楷体"/>
                 <a:cs typeface="楷体"/>
               </a:rPr>
-              <a:t>语言能力：说出信的驳论思路（立名实原则→破五罪），解释「名实相符」在文中的作用。</a:t>
-            </a:r>
-          </a:p>
-        </p:txBody>
-      </p:sp>
-      <p:sp>
-        <p:nvSpPr>
-          <p:cNvPr id="10" name="Rounded Rectangle 9"/>
+              <a:t>说出信的驳论思路（立名实原则→破五罪），解释「名实相符」在文中的作用。</a:t>
+            </a:r>
+          </a:p>
+        </p:txBody>
+      </p:sp>
+      <p:sp>
+        <p:nvSpPr>
+          <p:cNvPr id="11" name="Rounded Rectangle 10"/>
           <p:cNvSpPr/>
           <p:nvPr/>
         </p:nvSpPr>
         <p:spPr>
           <a:xfrm>
-            <a:off x="6263640" y="1417320"/>
-            <a:ext cx="5349240" cy="2057400"/>
+            <a:off x="6278727" y="2057400"/>
+            <a:ext cx="5272887" cy="2103120"/>
           </a:xfrm>
           <a:prstGeom prst="roundRect">
             <a:avLst/>
@@ -3794,9 +3875,9 @@
           <a:solidFill>
             <a:srgbClr val="FFFFFF"/>
           </a:solidFill>
-          <a:ln w="22860">
+          <a:ln w="20320">
             <a:solidFill>
-              <a:srgbClr val="B23A2A"/>
+              <a:srgbClr val="2E7D6B"/>
             </a:solidFill>
           </a:ln>
           <a:effectLst/>
@@ -3825,20 +3906,20 @@
       </p:sp>
       <p:sp>
         <p:nvSpPr>
-          <p:cNvPr id="11" name="Oval 10"/>
+          <p:cNvPr id="12" name="Oval 11"/>
           <p:cNvSpPr/>
           <p:nvPr/>
         </p:nvSpPr>
         <p:spPr>
           <a:xfrm>
-            <a:off x="6428232" y="1581912"/>
+            <a:off x="6507327" y="2258568"/>
             <a:ext cx="457200" cy="457200"/>
           </a:xfrm>
           <a:prstGeom prst="ellipse">
             <a:avLst/>
           </a:prstGeom>
           <a:solidFill>
-            <a:srgbClr val="B23A2A"/>
+            <a:srgbClr val="2E7D6B"/>
           </a:solidFill>
           <a:ln>
             <a:noFill/>
@@ -3869,14 +3950,14 @@
       </p:sp>
       <p:sp>
         <p:nvSpPr>
-          <p:cNvPr id="12" name="TextBox 11"/>
+          <p:cNvPr id="13" name="TextBox 12"/>
           <p:cNvSpPr txBox="1"/>
           <p:nvPr/>
         </p:nvSpPr>
         <p:spPr>
           <a:xfrm>
-            <a:off x="6428232" y="1636776"/>
-            <a:ext cx="457200" cy="384048"/>
+            <a:off x="6507327" y="2313432"/>
+            <a:ext cx="457200" cy="365760"/>
           </a:xfrm>
           <a:prstGeom prst="rect">
             <a:avLst/>
@@ -3891,7 +3972,7 @@
           <a:p>
             <a:pPr algn="ctr"/>
             <a:r>
-              <a:rPr sz="1600" b="1">
+              <a:rPr sz="1800" b="1">
                 <a:solidFill>
                   <a:srgbClr val="FFFFFF"/>
                 </a:solidFill>
@@ -3906,14 +3987,14 @@
       </p:sp>
       <p:sp>
         <p:nvSpPr>
-          <p:cNvPr id="13" name="TextBox 12"/>
+          <p:cNvPr id="14" name="TextBox 13"/>
           <p:cNvSpPr txBox="1"/>
           <p:nvPr/>
         </p:nvSpPr>
         <p:spPr>
           <a:xfrm>
-            <a:off x="6995160" y="1527048"/>
-            <a:ext cx="4434840" cy="457200"/>
+            <a:off x="7101687" y="2276856"/>
+            <a:ext cx="4267047" cy="457200"/>
           </a:xfrm>
           <a:prstGeom prst="rect">
             <a:avLst/>
@@ -3926,35 +4007,31 @@
           </a:bodyPr>
           <a:lstStyle/>
           <a:p>
-            <a:pPr algn="l">
-              <a:lnSpc>
-                <a:spcPct val="110000"/>
-              </a:lnSpc>
-            </a:pPr>
-            <a:r>
-              <a:rPr sz="1600" b="1">
-                <a:solidFill>
-                  <a:srgbClr val="1C2A33"/>
+            <a:pPr algn="l"/>
+            <a:r>
+              <a:rPr sz="1700" b="1">
+                <a:solidFill>
+                  <a:srgbClr val="2E7D6B"/>
                 </a:solidFill>
                 <a:latin typeface="微软雅黑"/>
                 <a:ea typeface="微软雅黑"/>
                 <a:cs typeface="微软雅黑"/>
               </a:rPr>
-              <a:t>目标</a:t>
-            </a:r>
-          </a:p>
-        </p:txBody>
-      </p:sp>
-      <p:sp>
-        <p:nvSpPr>
-          <p:cNvPr id="14" name="TextBox 13"/>
+              <a:t>文化意识</a:t>
+            </a:r>
+          </a:p>
+        </p:txBody>
+      </p:sp>
+      <p:sp>
+        <p:nvSpPr>
+          <p:cNvPr id="15" name="TextBox 14"/>
           <p:cNvSpPr txBox="1"/>
           <p:nvPr/>
         </p:nvSpPr>
         <p:spPr>
           <a:xfrm>
-            <a:off x="6995160" y="1965960"/>
-            <a:ext cx="4434840" cy="1417320"/>
+            <a:off x="6553047" y="2880360"/>
+            <a:ext cx="4724247" cy="1143000"/>
           </a:xfrm>
           <a:prstGeom prst="rect">
             <a:avLst/>
@@ -3969,11 +4046,11 @@
           <a:p>
             <a:pPr algn="l">
               <a:lnSpc>
-                <a:spcPct val="128000"/>
+                <a:spcPct val="150000"/>
               </a:lnSpc>
             </a:pPr>
             <a:r>
-              <a:rPr sz="1400" b="0">
+              <a:rPr sz="1350" b="0">
                 <a:solidFill>
                   <a:srgbClr val="1C2A33"/>
                 </a:solidFill>
@@ -3981,21 +4058,21 @@
                 <a:ea typeface="楷体"/>
                 <a:cs typeface="楷体"/>
               </a:rPr>
-              <a:t>文化意识：理解王安石「为天下理财」的改革担当与遭遇阻力。</a:t>
-            </a:r>
-          </a:p>
-        </p:txBody>
-      </p:sp>
-      <p:sp>
-        <p:nvSpPr>
-          <p:cNvPr id="15" name="Rounded Rectangle 14"/>
+              <a:t>理解王安石「为天下理财」的改革担当与遭遇阻力。</a:t>
+            </a:r>
+          </a:p>
+        </p:txBody>
+      </p:sp>
+      <p:sp>
+        <p:nvSpPr>
+          <p:cNvPr id="16" name="Rounded Rectangle 15"/>
           <p:cNvSpPr/>
           <p:nvPr/>
         </p:nvSpPr>
         <p:spPr>
           <a:xfrm>
-            <a:off x="640080" y="3703320"/>
-            <a:ext cx="5349240" cy="2057400"/>
+            <a:off x="640080" y="4434840"/>
+            <a:ext cx="5272887" cy="2103120"/>
           </a:xfrm>
           <a:prstGeom prst="roundRect">
             <a:avLst/>
@@ -4003,9 +4080,9 @@
           <a:solidFill>
             <a:srgbClr val="FFFFFF"/>
           </a:solidFill>
-          <a:ln w="22860">
+          <a:ln w="20320">
             <a:solidFill>
-              <a:srgbClr val="B23A2A"/>
+              <a:srgbClr val="C8A86B"/>
             </a:solidFill>
           </a:ln>
           <a:effectLst/>
@@ -4034,20 +4111,20 @@
       </p:sp>
       <p:sp>
         <p:nvSpPr>
-          <p:cNvPr id="16" name="Oval 15"/>
+          <p:cNvPr id="17" name="Oval 16"/>
           <p:cNvSpPr/>
           <p:nvPr/>
         </p:nvSpPr>
         <p:spPr>
           <a:xfrm>
-            <a:off x="804672" y="3867912"/>
+            <a:off x="868680" y="4636008"/>
             <a:ext cx="457200" cy="457200"/>
           </a:xfrm>
           <a:prstGeom prst="ellipse">
             <a:avLst/>
           </a:prstGeom>
           <a:solidFill>
-            <a:srgbClr val="B23A2A"/>
+            <a:srgbClr val="C8A86B"/>
           </a:solidFill>
           <a:ln>
             <a:noFill/>
@@ -4078,14 +4155,14 @@
       </p:sp>
       <p:sp>
         <p:nvSpPr>
-          <p:cNvPr id="17" name="TextBox 16"/>
+          <p:cNvPr id="18" name="TextBox 17"/>
           <p:cNvSpPr txBox="1"/>
           <p:nvPr/>
         </p:nvSpPr>
         <p:spPr>
           <a:xfrm>
-            <a:off x="804672" y="3922776"/>
-            <a:ext cx="457200" cy="384048"/>
+            <a:off x="868680" y="4690872"/>
+            <a:ext cx="457200" cy="365760"/>
           </a:xfrm>
           <a:prstGeom prst="rect">
             <a:avLst/>
@@ -4100,7 +4177,7 @@
           <a:p>
             <a:pPr algn="ctr"/>
             <a:r>
-              <a:rPr sz="1600" b="1">
+              <a:rPr sz="1800" b="1">
                 <a:solidFill>
                   <a:srgbClr val="FFFFFF"/>
                 </a:solidFill>
@@ -4115,14 +4192,14 @@
       </p:sp>
       <p:sp>
         <p:nvSpPr>
-          <p:cNvPr id="18" name="TextBox 17"/>
+          <p:cNvPr id="19" name="TextBox 18"/>
           <p:cNvSpPr txBox="1"/>
           <p:nvPr/>
         </p:nvSpPr>
         <p:spPr>
           <a:xfrm>
-            <a:off x="1371600" y="3813048"/>
-            <a:ext cx="4434840" cy="457200"/>
+            <a:off x="1463040" y="4654296"/>
+            <a:ext cx="4267047" cy="457200"/>
           </a:xfrm>
           <a:prstGeom prst="rect">
             <a:avLst/>
@@ -4135,35 +4212,31 @@
           </a:bodyPr>
           <a:lstStyle/>
           <a:p>
-            <a:pPr algn="l">
-              <a:lnSpc>
-                <a:spcPct val="110000"/>
-              </a:lnSpc>
-            </a:pPr>
-            <a:r>
-              <a:rPr sz="1600" b="1">
-                <a:solidFill>
-                  <a:srgbClr val="1C2A33"/>
+            <a:pPr algn="l"/>
+            <a:r>
+              <a:rPr sz="1700" b="1">
+                <a:solidFill>
+                  <a:srgbClr val="C8A86B"/>
                 </a:solidFill>
                 <a:latin typeface="微软雅黑"/>
                 <a:ea typeface="微软雅黑"/>
                 <a:cs typeface="微软雅黑"/>
               </a:rPr>
-              <a:t>目标</a:t>
-            </a:r>
-          </a:p>
-        </p:txBody>
-      </p:sp>
-      <p:sp>
-        <p:nvSpPr>
-          <p:cNvPr id="19" name="TextBox 18"/>
+              <a:t>思维品质</a:t>
+            </a:r>
+          </a:p>
+        </p:txBody>
+      </p:sp>
+      <p:sp>
+        <p:nvSpPr>
+          <p:cNvPr id="20" name="TextBox 19"/>
           <p:cNvSpPr txBox="1"/>
           <p:nvPr/>
         </p:nvSpPr>
         <p:spPr>
           <a:xfrm>
-            <a:off x="1371600" y="4251960"/>
-            <a:ext cx="4434840" cy="1417320"/>
+            <a:off x="914400" y="5257800"/>
+            <a:ext cx="4724247" cy="1143000"/>
           </a:xfrm>
           <a:prstGeom prst="rect">
             <a:avLst/>
@@ -4178,11 +4251,11 @@
           <a:p>
             <a:pPr algn="l">
               <a:lnSpc>
-                <a:spcPct val="128000"/>
+                <a:spcPct val="150000"/>
               </a:lnSpc>
             </a:pPr>
             <a:r>
-              <a:rPr sz="1400" b="0">
+              <a:rPr sz="1350" b="0">
                 <a:solidFill>
                   <a:srgbClr val="1C2A33"/>
                 </a:solidFill>
@@ -4190,21 +4263,21 @@
                 <a:ea typeface="楷体"/>
                 <a:cs typeface="楷体"/>
               </a:rPr>
-              <a:t>思维品质：通过分析驳论结构，培养「先立后破」的思辨思维。</a:t>
-            </a:r>
-          </a:p>
-        </p:txBody>
-      </p:sp>
-      <p:sp>
-        <p:nvSpPr>
-          <p:cNvPr id="20" name="Rounded Rectangle 19"/>
+              <a:t>通过分析驳论结构，培养「先立后破」的思辨思维。</a:t>
+            </a:r>
+          </a:p>
+        </p:txBody>
+      </p:sp>
+      <p:sp>
+        <p:nvSpPr>
+          <p:cNvPr id="21" name="Rounded Rectangle 20"/>
           <p:cNvSpPr/>
           <p:nvPr/>
         </p:nvSpPr>
         <p:spPr>
           <a:xfrm>
-            <a:off x="6263640" y="3703320"/>
-            <a:ext cx="5349240" cy="2057400"/>
+            <a:off x="6278727" y="4434840"/>
+            <a:ext cx="5272887" cy="2103120"/>
           </a:xfrm>
           <a:prstGeom prst="roundRect">
             <a:avLst/>
@@ -4212,9 +4285,9 @@
           <a:solidFill>
             <a:srgbClr val="FFFFFF"/>
           </a:solidFill>
-          <a:ln w="22860">
+          <a:ln w="20320">
             <a:solidFill>
-              <a:srgbClr val="B23A2A"/>
+              <a:srgbClr val="6B6258"/>
             </a:solidFill>
           </a:ln>
           <a:effectLst/>
@@ -4243,20 +4316,20 @@
       </p:sp>
       <p:sp>
         <p:nvSpPr>
-          <p:cNvPr id="21" name="Oval 20"/>
+          <p:cNvPr id="22" name="Oval 21"/>
           <p:cNvSpPr/>
           <p:nvPr/>
         </p:nvSpPr>
         <p:spPr>
           <a:xfrm>
-            <a:off x="6428232" y="3867912"/>
+            <a:off x="6507327" y="4636008"/>
             <a:ext cx="457200" cy="457200"/>
           </a:xfrm>
           <a:prstGeom prst="ellipse">
             <a:avLst/>
           </a:prstGeom>
           <a:solidFill>
-            <a:srgbClr val="B23A2A"/>
+            <a:srgbClr val="6B6258"/>
           </a:solidFill>
           <a:ln>
             <a:noFill/>
@@ -4287,14 +4360,14 @@
       </p:sp>
       <p:sp>
         <p:nvSpPr>
-          <p:cNvPr id="22" name="TextBox 21"/>
+          <p:cNvPr id="23" name="TextBox 22"/>
           <p:cNvSpPr txBox="1"/>
           <p:nvPr/>
         </p:nvSpPr>
         <p:spPr>
           <a:xfrm>
-            <a:off x="6428232" y="3922776"/>
-            <a:ext cx="457200" cy="384048"/>
+            <a:off x="6507327" y="4690872"/>
+            <a:ext cx="457200" cy="365760"/>
           </a:xfrm>
           <a:prstGeom prst="rect">
             <a:avLst/>
@@ -4309,7 +4382,7 @@
           <a:p>
             <a:pPr algn="ctr"/>
             <a:r>
-              <a:rPr sz="1600" b="1">
+              <a:rPr sz="1800" b="1">
                 <a:solidFill>
                   <a:srgbClr val="FFFFFF"/>
                 </a:solidFill>
@@ -4324,14 +4397,14 @@
       </p:sp>
       <p:sp>
         <p:nvSpPr>
-          <p:cNvPr id="23" name="TextBox 22"/>
+          <p:cNvPr id="24" name="TextBox 23"/>
           <p:cNvSpPr txBox="1"/>
           <p:nvPr/>
         </p:nvSpPr>
         <p:spPr>
           <a:xfrm>
-            <a:off x="6995160" y="3813048"/>
-            <a:ext cx="4434840" cy="457200"/>
+            <a:off x="7101687" y="4654296"/>
+            <a:ext cx="4267047" cy="457200"/>
           </a:xfrm>
           <a:prstGeom prst="rect">
             <a:avLst/>
@@ -4344,35 +4417,31 @@
           </a:bodyPr>
           <a:lstStyle/>
           <a:p>
-            <a:pPr algn="l">
-              <a:lnSpc>
-                <a:spcPct val="110000"/>
-              </a:lnSpc>
-            </a:pPr>
-            <a:r>
-              <a:rPr sz="1600" b="1">
-                <a:solidFill>
-                  <a:srgbClr val="1C2A33"/>
+            <a:pPr algn="l"/>
+            <a:r>
+              <a:rPr sz="1700" b="1">
+                <a:solidFill>
+                  <a:srgbClr val="6B6258"/>
                 </a:solidFill>
                 <a:latin typeface="微软雅黑"/>
                 <a:ea typeface="微软雅黑"/>
                 <a:cs typeface="微软雅黑"/>
               </a:rPr>
-              <a:t>目标</a:t>
-            </a:r>
-          </a:p>
-        </p:txBody>
-      </p:sp>
-      <p:sp>
-        <p:nvSpPr>
-          <p:cNvPr id="24" name="TextBox 23"/>
+              <a:t>学习能力</a:t>
+            </a:r>
+          </a:p>
+        </p:txBody>
+      </p:sp>
+      <p:sp>
+        <p:nvSpPr>
+          <p:cNvPr id="25" name="TextBox 24"/>
           <p:cNvSpPr txBox="1"/>
           <p:nvPr/>
         </p:nvSpPr>
         <p:spPr>
           <a:xfrm>
-            <a:off x="6995160" y="4251960"/>
-            <a:ext cx="4434840" cy="1417320"/>
+            <a:off x="6553047" y="5257800"/>
+            <a:ext cx="4724247" cy="1143000"/>
           </a:xfrm>
           <a:prstGeom prst="rect">
             <a:avLst/>
@@ -4387,11 +4456,11 @@
           <a:p>
             <a:pPr algn="l">
               <a:lnSpc>
-                <a:spcPct val="128000"/>
+                <a:spcPct val="150000"/>
               </a:lnSpc>
             </a:pPr>
             <a:r>
-              <a:rPr sz="1400" b="0">
+              <a:rPr sz="1350" b="0">
                 <a:solidFill>
                   <a:srgbClr val="1C2A33"/>
                 </a:solidFill>
@@ -4399,14 +4468,14 @@
                 <a:ea typeface="楷体"/>
                 <a:cs typeface="楷体"/>
               </a:rPr>
-              <a:t>学习能力：掌握「抓原则、理驳点、品犀利」的驳论读法。</a:t>
-            </a:r>
-          </a:p>
-        </p:txBody>
-      </p:sp>
-      <p:sp>
-        <p:nvSpPr>
-          <p:cNvPr id="25" name="TextBox 24"/>
+              <a:t>掌握「抓原则、理驳点、品犀利」的驳论读法。</a:t>
+            </a:r>
+          </a:p>
+        </p:txBody>
+      </p:sp>
+      <p:sp>
+        <p:nvSpPr>
+          <p:cNvPr id="26" name="TextBox 25"/>
           <p:cNvSpPr txBox="1"/>
           <p:nvPr/>
         </p:nvSpPr>
@@ -4533,13 +4602,13 @@
             <a:r>
               <a:rPr sz="1300" b="1">
                 <a:solidFill>
-                  <a:srgbClr val="2E7D6B"/>
+                  <a:srgbClr val="B23A2A"/>
                 </a:solidFill>
                 <a:latin typeface="微软雅黑"/>
                 <a:ea typeface="微软雅黑"/>
                 <a:cs typeface="微软雅黑"/>
               </a:rPr>
-              <a:t>课文背景</a:t>
+              <a:t>背景 · 权威调研</a:t>
             </a:r>
           </a:p>
         </p:txBody>
@@ -4559,7 +4628,7 @@
             <a:avLst/>
           </a:prstGeom>
           <a:solidFill>
-            <a:srgbClr val="2E7D6B"/>
+            <a:srgbClr val="B23A2A"/>
           </a:solidFill>
           <a:ln>
             <a:noFill/>
@@ -4596,8 +4665,8 @@
         </p:nvSpPr>
         <p:spPr>
           <a:xfrm>
-            <a:off x="640080" y="1508760"/>
-            <a:ext cx="6766560" cy="4572000"/>
+            <a:off x="640080" y="1325880"/>
+            <a:ext cx="10911535" cy="548640"/>
           </a:xfrm>
           <a:prstGeom prst="rect">
             <a:avLst/>
@@ -4610,16 +4679,53 @@
           </a:bodyPr>
           <a:lstStyle/>
           <a:p>
+            <a:pPr algn="l"/>
+            <a:r>
+              <a:rPr sz="2600" b="1">
+                <a:solidFill>
+                  <a:srgbClr val="1C2A33"/>
+                </a:solidFill>
+                <a:latin typeface="楷体"/>
+                <a:ea typeface="楷体"/>
+                <a:cs typeface="楷体"/>
+              </a:rPr>
+              <a:t>课文背景与研读来源</a:t>
+            </a:r>
+          </a:p>
+        </p:txBody>
+      </p:sp>
+      <p:sp>
+        <p:nvSpPr>
+          <p:cNvPr id="6" name="TextBox 5"/>
+          <p:cNvSpPr txBox="1"/>
+          <p:nvPr/>
+        </p:nvSpPr>
+        <p:spPr>
+          <a:xfrm>
+            <a:off x="640080" y="2011680"/>
+            <a:ext cx="5227167" cy="4572000"/>
+          </a:xfrm>
+          <a:prstGeom prst="rect">
+            <a:avLst/>
+          </a:prstGeom>
+          <a:noFill/>
+        </p:spPr>
+        <p:txBody>
+          <a:bodyPr wrap="square" anchor="t" lIns="0" rIns="0" tIns="0" bIns="0">
+            <a:spAutoFit/>
+          </a:bodyPr>
+          <a:lstStyle/>
+          <a:p>
             <a:pPr algn="l">
               <a:lnSpc>
-                <a:spcPct val="150000"/>
+                <a:spcPct val="155000"/>
               </a:lnSpc>
               <a:spcAft>
                 <a:spcPts val="600"/>
               </a:spcAft>
             </a:pPr>
             <a:r>
-              <a:rPr sz="1600" b="0">
+              <a:rPr sz="1450" b="0">
                 <a:solidFill>
                   <a:srgbClr val="1C2A33"/>
                 </a:solidFill>
@@ -4632,41 +4738,62 @@
           </a:p>
         </p:txBody>
       </p:sp>
-      <p:pic>
-        <p:nvPicPr>
-          <p:cNvPr id="6" name="Picture 5" descr="typewriter.jpg"/>
-          <p:cNvPicPr>
-            <a:picLocks noChangeAspect="1"/>
-          </p:cNvPicPr>
-          <p:nvPr/>
-        </p:nvPicPr>
-        <p:blipFill>
-          <a:blip r:embed="rId2"/>
-          <a:srcRect l="5860" r="5860"/>
-          <a:stretch>
-            <a:fillRect/>
-          </a:stretch>
-        </p:blipFill>
-        <p:spPr>
-          <a:xfrm>
-            <a:off x="8046720" y="1508760"/>
-            <a:ext cx="4114800" cy="3108960"/>
-          </a:xfrm>
-          <a:prstGeom prst="rect">
-            <a:avLst/>
-          </a:prstGeom>
-        </p:spPr>
-      </p:pic>
-      <p:sp>
-        <p:nvSpPr>
-          <p:cNvPr id="7" name="TextBox 6"/>
+      <p:sp>
+        <p:nvSpPr>
+          <p:cNvPr id="7" name="Rounded Rectangle 6"/>
+          <p:cNvSpPr/>
+          <p:nvPr/>
+        </p:nvSpPr>
+        <p:spPr>
+          <a:xfrm>
+            <a:off x="6324447" y="2011680"/>
+            <a:ext cx="5227167" cy="4572000"/>
+          </a:xfrm>
+          <a:prstGeom prst="roundRect">
+            <a:avLst/>
+          </a:prstGeom>
+          <a:solidFill>
+            <a:srgbClr val="1C2A33"/>
+          </a:solidFill>
+          <a:ln w="22860">
+            <a:solidFill>
+              <a:srgbClr val="C8A86B"/>
+            </a:solidFill>
+          </a:ln>
+          <a:effectLst/>
+        </p:spPr>
+        <p:style>
+          <a:lnRef idx="1">
+            <a:schemeClr val="accent1"/>
+          </a:lnRef>
+          <a:fillRef idx="3">
+            <a:schemeClr val="accent1"/>
+          </a:fillRef>
+          <a:effectRef idx="2">
+            <a:schemeClr val="accent1"/>
+          </a:effectRef>
+          <a:fontRef idx="minor">
+            <a:schemeClr val="lt1"/>
+          </a:fontRef>
+        </p:style>
+        <p:txBody>
+          <a:bodyPr rtlCol="0" anchor="ctr"/>
+          <a:lstStyle/>
+          <a:p>
+            <a:pPr algn="ctr"/>
+          </a:p>
+        </p:txBody>
+      </p:sp>
+      <p:sp>
+        <p:nvSpPr>
+          <p:cNvPr id="8" name="TextBox 7"/>
           <p:cNvSpPr txBox="1"/>
           <p:nvPr/>
         </p:nvSpPr>
         <p:spPr>
           <a:xfrm>
-            <a:off x="8046720" y="4663440"/>
-            <a:ext cx="4114800" cy="365760"/>
+            <a:off x="6598767" y="2212848"/>
+            <a:ext cx="4678527" cy="457200"/>
           </a:xfrm>
           <a:prstGeom prst="rect">
             <a:avLst/>
@@ -4679,24 +4806,149 @@
           </a:bodyPr>
           <a:lstStyle/>
           <a:p>
+            <a:pPr algn="l"/>
+            <a:r>
+              <a:rPr sz="1700" b="1">
+                <a:solidFill>
+                  <a:srgbClr val="C8A86B"/>
+                </a:solidFill>
+                <a:latin typeface="楷体"/>
+                <a:ea typeface="楷体"/>
+                <a:cs typeface="楷体"/>
+              </a:rPr>
+              <a:t>研读来源</a:t>
+            </a:r>
+          </a:p>
+        </p:txBody>
+      </p:sp>
+      <p:sp>
+        <p:nvSpPr>
+          <p:cNvPr id="9" name="TextBox 8"/>
+          <p:cNvSpPr txBox="1"/>
+          <p:nvPr/>
+        </p:nvSpPr>
+        <p:spPr>
+          <a:xfrm>
+            <a:off x="6598767" y="2743200"/>
+            <a:ext cx="4678527" cy="914400"/>
+          </a:xfrm>
+          <a:prstGeom prst="rect">
+            <a:avLst/>
+          </a:prstGeom>
+          <a:noFill/>
+        </p:spPr>
+        <p:txBody>
+          <a:bodyPr wrap="square" anchor="t" lIns="0" rIns="0" tIns="0" bIns="0">
+            <a:spAutoFit/>
+          </a:bodyPr>
+          <a:lstStyle/>
+          <a:p>
+            <a:pPr algn="l">
+              <a:lnSpc>
+                <a:spcPct val="140000"/>
+              </a:lnSpc>
+              <a:spcAft>
+                <a:spcPts val="400"/>
+              </a:spcAft>
+            </a:pPr>
+            <a:r>
+              <a:rPr sz="1250" b="0">
+                <a:solidFill>
+                  <a:srgbClr val="FFFFFF"/>
+                </a:solidFill>
+                <a:latin typeface="楷体"/>
+                <a:ea typeface="楷体"/>
+                <a:cs typeface="楷体"/>
+              </a:rPr>
+              <a:t>来源：可可诗词网《王安石〈答司马谏议书〉》——驳「侵官生事征利拒谏」四罪。</a:t>
+            </a:r>
+          </a:p>
+        </p:txBody>
+      </p:sp>
+      <p:sp>
+        <p:nvSpPr>
+          <p:cNvPr id="10" name="TextBox 9"/>
+          <p:cNvSpPr txBox="1"/>
+          <p:nvPr/>
+        </p:nvSpPr>
+        <p:spPr>
+          <a:xfrm>
+            <a:off x="6598767" y="3657600"/>
+            <a:ext cx="4678527" cy="914400"/>
+          </a:xfrm>
+          <a:prstGeom prst="rect">
+            <a:avLst/>
+          </a:prstGeom>
+          <a:noFill/>
+        </p:spPr>
+        <p:txBody>
+          <a:bodyPr wrap="square" anchor="t" lIns="0" rIns="0" tIns="0" bIns="0">
+            <a:spAutoFit/>
+          </a:bodyPr>
+          <a:lstStyle/>
+          <a:p>
+            <a:pPr algn="l">
+              <a:lnSpc>
+                <a:spcPct val="140000"/>
+              </a:lnSpc>
+              <a:spcAft>
+                <a:spcPts val="400"/>
+              </a:spcAft>
+            </a:pPr>
+            <a:r>
+              <a:rPr sz="1250" b="0">
+                <a:solidFill>
+                  <a:srgbClr val="FFFFFF"/>
+                </a:solidFill>
+                <a:latin typeface="楷体"/>
+                <a:ea typeface="楷体"/>
+                <a:cs typeface="楷体"/>
+              </a:rPr>
+              <a:t>来源：人民教育出版社《必修下册》第八单元——古代说理文思辨性阅读。</a:t>
+            </a:r>
+          </a:p>
+        </p:txBody>
+      </p:sp>
+      <p:sp>
+        <p:nvSpPr>
+          <p:cNvPr id="11" name="TextBox 10"/>
+          <p:cNvSpPr txBox="1"/>
+          <p:nvPr/>
+        </p:nvSpPr>
+        <p:spPr>
+          <a:xfrm>
+            <a:off x="6324447" y="6446520"/>
+            <a:ext cx="5227167" cy="365760"/>
+          </a:xfrm>
+          <a:prstGeom prst="rect">
+            <a:avLst/>
+          </a:prstGeom>
+          <a:noFill/>
+        </p:spPr>
+        <p:txBody>
+          <a:bodyPr wrap="square" anchor="t" lIns="0" rIns="0" tIns="0" bIns="0">
+            <a:spAutoFit/>
+          </a:bodyPr>
+          <a:lstStyle/>
+          <a:p>
             <a:pPr algn="ctr"/>
             <a:r>
               <a:rPr sz="1100" b="0">
                 <a:solidFill>
-                  <a:srgbClr val="6B6258"/>
+                  <a:srgbClr val="E7DFD2"/>
                 </a:solidFill>
                 <a:latin typeface="微软雅黑"/>
                 <a:ea typeface="微软雅黑"/>
                 <a:cs typeface="微软雅黑"/>
               </a:rPr>
-              <a:t>资料图（自由授权，复用 typewriter.jpg）</a:t>
-            </a:r>
-          </a:p>
-        </p:txBody>
-      </p:sp>
-      <p:sp>
-        <p:nvSpPr>
-          <p:cNvPr id="8" name="TextBox 7"/>
+              <a:t>本课件未使用无关配图（无契合照片，学科色块兜底）</a:t>
+            </a:r>
+          </a:p>
+        </p:txBody>
+      </p:sp>
+      <p:sp>
+        <p:nvSpPr>
+          <p:cNvPr id="12" name="TextBox 11"/>
           <p:cNvSpPr txBox="1"/>
           <p:nvPr/>
         </p:nvSpPr>
@@ -4829,7 +5081,7 @@
                 <a:ea typeface="微软雅黑"/>
                 <a:cs typeface="微软雅黑"/>
               </a:rPr>
-              <a:t>学习重点</a:t>
+              <a:t>重点</a:t>
             </a:r>
           </a:p>
         </p:txBody>
@@ -4880,14 +5132,299 @@
       </p:sp>
       <p:sp>
         <p:nvSpPr>
-          <p:cNvPr id="5" name="Rounded Rectangle 4"/>
+          <p:cNvPr id="5" name="TextBox 4"/>
+          <p:cNvSpPr txBox="1"/>
+          <p:nvPr/>
+        </p:nvSpPr>
+        <p:spPr>
+          <a:xfrm>
+            <a:off x="640080" y="1325880"/>
+            <a:ext cx="10911535" cy="548640"/>
+          </a:xfrm>
+          <a:prstGeom prst="rect">
+            <a:avLst/>
+          </a:prstGeom>
+          <a:noFill/>
+        </p:spPr>
+        <p:txBody>
+          <a:bodyPr wrap="square" anchor="t" lIns="0" rIns="0" tIns="0" bIns="0">
+            <a:spAutoFit/>
+          </a:bodyPr>
+          <a:lstStyle/>
+          <a:p>
+            <a:pPr algn="l"/>
+            <a:r>
+              <a:rPr sz="2800" b="1">
+                <a:solidFill>
+                  <a:srgbClr val="1C2A33"/>
+                </a:solidFill>
+                <a:latin typeface="楷体"/>
+                <a:ea typeface="楷体"/>
+                <a:cs typeface="楷体"/>
+              </a:rPr>
+              <a:t>本课重点</a:t>
+            </a:r>
+          </a:p>
+        </p:txBody>
+      </p:sp>
+      <p:sp>
+        <p:nvSpPr>
+          <p:cNvPr id="6" name="Rounded Rectangle 5"/>
           <p:cNvSpPr/>
           <p:nvPr/>
         </p:nvSpPr>
         <p:spPr>
           <a:xfrm>
-            <a:off x="640080" y="1371600"/>
-            <a:ext cx="10911535" cy="1597152"/>
+            <a:off x="640080" y="2194560"/>
+            <a:ext cx="3393338" cy="3931920"/>
+          </a:xfrm>
+          <a:prstGeom prst="roundRect">
+            <a:avLst/>
+          </a:prstGeom>
+          <a:solidFill>
+            <a:srgbClr val="FFFFFF"/>
+          </a:solidFill>
+          <a:ln w="22860">
+            <a:solidFill>
+              <a:srgbClr val="B23A2A"/>
+            </a:solidFill>
+          </a:ln>
+          <a:effectLst/>
+        </p:spPr>
+        <p:style>
+          <a:lnRef idx="1">
+            <a:schemeClr val="accent1"/>
+          </a:lnRef>
+          <a:fillRef idx="3">
+            <a:schemeClr val="accent1"/>
+          </a:fillRef>
+          <a:effectRef idx="2">
+            <a:schemeClr val="accent1"/>
+          </a:effectRef>
+          <a:fontRef idx="minor">
+            <a:schemeClr val="lt1"/>
+          </a:fontRef>
+        </p:style>
+        <p:txBody>
+          <a:bodyPr rtlCol="0" anchor="ctr"/>
+          <a:lstStyle/>
+          <a:p>
+            <a:pPr algn="ctr"/>
+          </a:p>
+        </p:txBody>
+      </p:sp>
+      <p:sp>
+        <p:nvSpPr>
+          <p:cNvPr id="7" name="TextBox 6"/>
+          <p:cNvSpPr txBox="1"/>
+          <p:nvPr/>
+        </p:nvSpPr>
+        <p:spPr>
+          <a:xfrm>
+            <a:off x="868680" y="2423160"/>
+            <a:ext cx="2936138" cy="548640"/>
+          </a:xfrm>
+          <a:prstGeom prst="rect">
+            <a:avLst/>
+          </a:prstGeom>
+          <a:noFill/>
+        </p:spPr>
+        <p:txBody>
+          <a:bodyPr wrap="square" anchor="t" lIns="0" rIns="0" tIns="0" bIns="0">
+            <a:spAutoFit/>
+          </a:bodyPr>
+          <a:lstStyle/>
+          <a:p>
+            <a:pPr algn="l"/>
+            <a:r>
+              <a:rPr sz="1500" b="1">
+                <a:solidFill>
+                  <a:srgbClr val="B23A2A"/>
+                </a:solidFill>
+                <a:latin typeface="微软雅黑"/>
+                <a:ea typeface="微软雅黑"/>
+                <a:cs typeface="微软雅黑"/>
+              </a:rPr>
+              <a:t>重点 1</a:t>
+            </a:r>
+          </a:p>
+        </p:txBody>
+      </p:sp>
+      <p:sp>
+        <p:nvSpPr>
+          <p:cNvPr id="8" name="TextBox 7"/>
+          <p:cNvSpPr txBox="1"/>
+          <p:nvPr/>
+        </p:nvSpPr>
+        <p:spPr>
+          <a:xfrm>
+            <a:off x="868680" y="3063240"/>
+            <a:ext cx="2936138" cy="2926080"/>
+          </a:xfrm>
+          <a:prstGeom prst="rect">
+            <a:avLst/>
+          </a:prstGeom>
+          <a:noFill/>
+        </p:spPr>
+        <p:txBody>
+          <a:bodyPr wrap="square" anchor="t" lIns="0" rIns="0" tIns="0" bIns="0">
+            <a:spAutoFit/>
+          </a:bodyPr>
+          <a:lstStyle/>
+          <a:p>
+            <a:pPr algn="l">
+              <a:lnSpc>
+                <a:spcPct val="150000"/>
+              </a:lnSpc>
+            </a:pPr>
+            <a:r>
+              <a:rPr sz="1500" b="0">
+                <a:solidFill>
+                  <a:srgbClr val="1C2A33"/>
+                </a:solidFill>
+                <a:latin typeface="楷体"/>
+                <a:ea typeface="楷体"/>
+                <a:cs typeface="楷体"/>
+              </a:rPr>
+              <a:t>原则：名实相符（名与实须合）。</a:t>
+            </a:r>
+          </a:p>
+        </p:txBody>
+      </p:sp>
+      <p:sp>
+        <p:nvSpPr>
+          <p:cNvPr id="9" name="Rounded Rectangle 8"/>
+          <p:cNvSpPr/>
+          <p:nvPr/>
+        </p:nvSpPr>
+        <p:spPr>
+          <a:xfrm>
+            <a:off x="4399178" y="2194560"/>
+            <a:ext cx="3393338" cy="3931920"/>
+          </a:xfrm>
+          <a:prstGeom prst="roundRect">
+            <a:avLst/>
+          </a:prstGeom>
+          <a:solidFill>
+            <a:srgbClr val="FFFFFF"/>
+          </a:solidFill>
+          <a:ln w="22860">
+            <a:solidFill>
+              <a:srgbClr val="2E7D6B"/>
+            </a:solidFill>
+          </a:ln>
+          <a:effectLst/>
+        </p:spPr>
+        <p:style>
+          <a:lnRef idx="1">
+            <a:schemeClr val="accent1"/>
+          </a:lnRef>
+          <a:fillRef idx="3">
+            <a:schemeClr val="accent1"/>
+          </a:fillRef>
+          <a:effectRef idx="2">
+            <a:schemeClr val="accent1"/>
+          </a:effectRef>
+          <a:fontRef idx="minor">
+            <a:schemeClr val="lt1"/>
+          </a:fontRef>
+        </p:style>
+        <p:txBody>
+          <a:bodyPr rtlCol="0" anchor="ctr"/>
+          <a:lstStyle/>
+          <a:p>
+            <a:pPr algn="ctr"/>
+          </a:p>
+        </p:txBody>
+      </p:sp>
+      <p:sp>
+        <p:nvSpPr>
+          <p:cNvPr id="10" name="TextBox 9"/>
+          <p:cNvSpPr txBox="1"/>
+          <p:nvPr/>
+        </p:nvSpPr>
+        <p:spPr>
+          <a:xfrm>
+            <a:off x="4627778" y="2423160"/>
+            <a:ext cx="2936138" cy="548640"/>
+          </a:xfrm>
+          <a:prstGeom prst="rect">
+            <a:avLst/>
+          </a:prstGeom>
+          <a:noFill/>
+        </p:spPr>
+        <p:txBody>
+          <a:bodyPr wrap="square" anchor="t" lIns="0" rIns="0" tIns="0" bIns="0">
+            <a:spAutoFit/>
+          </a:bodyPr>
+          <a:lstStyle/>
+          <a:p>
+            <a:pPr algn="l"/>
+            <a:r>
+              <a:rPr sz="1500" b="1">
+                <a:solidFill>
+                  <a:srgbClr val="2E7D6B"/>
+                </a:solidFill>
+                <a:latin typeface="微软雅黑"/>
+                <a:ea typeface="微软雅黑"/>
+                <a:cs typeface="微软雅黑"/>
+              </a:rPr>
+              <a:t>重点 2</a:t>
+            </a:r>
+          </a:p>
+        </p:txBody>
+      </p:sp>
+      <p:sp>
+        <p:nvSpPr>
+          <p:cNvPr id="11" name="TextBox 10"/>
+          <p:cNvSpPr txBox="1"/>
+          <p:nvPr/>
+        </p:nvSpPr>
+        <p:spPr>
+          <a:xfrm>
+            <a:off x="4627778" y="3063240"/>
+            <a:ext cx="2936138" cy="2926080"/>
+          </a:xfrm>
+          <a:prstGeom prst="rect">
+            <a:avLst/>
+          </a:prstGeom>
+          <a:noFill/>
+        </p:spPr>
+        <p:txBody>
+          <a:bodyPr wrap="square" anchor="t" lIns="0" rIns="0" tIns="0" bIns="0">
+            <a:spAutoFit/>
+          </a:bodyPr>
+          <a:lstStyle/>
+          <a:p>
+            <a:pPr algn="l">
+              <a:lnSpc>
+                <a:spcPct val="150000"/>
+              </a:lnSpc>
+            </a:pPr>
+            <a:r>
+              <a:rPr sz="1500" b="0">
+                <a:solidFill>
+                  <a:srgbClr val="1C2A33"/>
+                </a:solidFill>
+                <a:latin typeface="楷体"/>
+                <a:ea typeface="楷体"/>
+                <a:cs typeface="楷体"/>
+              </a:rPr>
+              <a:t>驳五罪：侵官/生事/征利/拒谏/致怨，逐条破。</a:t>
+            </a:r>
+          </a:p>
+        </p:txBody>
+      </p:sp>
+      <p:sp>
+        <p:nvSpPr>
+          <p:cNvPr id="12" name="Rounded Rectangle 11"/>
+          <p:cNvSpPr/>
+          <p:nvPr/>
+        </p:nvSpPr>
+        <p:spPr>
+          <a:xfrm>
+            <a:off x="8158276" y="2194560"/>
+            <a:ext cx="3393338" cy="3931920"/>
           </a:xfrm>
           <a:prstGeom prst="roundRect">
             <a:avLst/>
@@ -4926,14 +5463,14 @@
       </p:sp>
       <p:sp>
         <p:nvSpPr>
-          <p:cNvPr id="6" name="TextBox 5"/>
+          <p:cNvPr id="13" name="TextBox 12"/>
           <p:cNvSpPr txBox="1"/>
           <p:nvPr/>
         </p:nvSpPr>
         <p:spPr>
           <a:xfrm>
-            <a:off x="1371600" y="1481328"/>
-            <a:ext cx="9997135" cy="457200"/>
+            <a:off x="8386876" y="2423160"/>
+            <a:ext cx="2936138" cy="548640"/>
           </a:xfrm>
           <a:prstGeom prst="rect">
             <a:avLst/>
@@ -4946,35 +5483,31 @@
           </a:bodyPr>
           <a:lstStyle/>
           <a:p>
-            <a:pPr algn="l">
-              <a:lnSpc>
-                <a:spcPct val="110000"/>
-              </a:lnSpc>
-            </a:pPr>
-            <a:r>
-              <a:rPr sz="1600" b="1">
-                <a:solidFill>
-                  <a:srgbClr val="1C2A33"/>
+            <a:pPr algn="l"/>
+            <a:r>
+              <a:rPr sz="1500" b="1">
+                <a:solidFill>
+                  <a:srgbClr val="C8A86B"/>
                 </a:solidFill>
                 <a:latin typeface="微软雅黑"/>
                 <a:ea typeface="微软雅黑"/>
                 <a:cs typeface="微软雅黑"/>
               </a:rPr>
-              <a:t/>
-            </a:r>
-          </a:p>
-        </p:txBody>
-      </p:sp>
-      <p:sp>
-        <p:nvSpPr>
-          <p:cNvPr id="7" name="TextBox 6"/>
+              <a:t>重点 3</a:t>
+            </a:r>
+          </a:p>
+        </p:txBody>
+      </p:sp>
+      <p:sp>
+        <p:nvSpPr>
+          <p:cNvPr id="14" name="TextBox 13"/>
           <p:cNvSpPr txBox="1"/>
           <p:nvPr/>
         </p:nvSpPr>
         <p:spPr>
           <a:xfrm>
-            <a:off x="1371600" y="1920240"/>
-            <a:ext cx="9997135" cy="957072"/>
+            <a:off x="8386876" y="3063240"/>
+            <a:ext cx="2936138" cy="2926080"/>
           </a:xfrm>
           <a:prstGeom prst="rect">
             <a:avLst/>
@@ -4989,11 +5522,11 @@
           <a:p>
             <a:pPr algn="l">
               <a:lnSpc>
-                <a:spcPct val="128000"/>
+                <a:spcPct val="150000"/>
               </a:lnSpc>
             </a:pPr>
             <a:r>
-              <a:rPr sz="1300" b="0">
+              <a:rPr sz="1500" b="0">
                 <a:solidFill>
                   <a:srgbClr val="1C2A33"/>
                 </a:solidFill>
@@ -5001,270 +5534,14 @@
                 <a:ea typeface="楷体"/>
                 <a:cs typeface="楷体"/>
               </a:rPr>
-              <a:t>① 原则：名实相符（名与实须合）。</a:t>
-            </a:r>
-          </a:p>
-        </p:txBody>
-      </p:sp>
-      <p:sp>
-        <p:nvSpPr>
-          <p:cNvPr id="8" name="Rounded Rectangle 7"/>
-          <p:cNvSpPr/>
-          <p:nvPr/>
-        </p:nvSpPr>
-        <p:spPr>
-          <a:xfrm>
-            <a:off x="640080" y="3078480"/>
-            <a:ext cx="10911535" cy="1597152"/>
-          </a:xfrm>
-          <a:prstGeom prst="roundRect">
-            <a:avLst/>
-          </a:prstGeom>
-          <a:solidFill>
-            <a:srgbClr val="FFFFFF"/>
-          </a:solidFill>
-          <a:ln w="22860">
-            <a:solidFill>
-              <a:srgbClr val="C8A86B"/>
-            </a:solidFill>
-          </a:ln>
-          <a:effectLst/>
-        </p:spPr>
-        <p:style>
-          <a:lnRef idx="1">
-            <a:schemeClr val="accent1"/>
-          </a:lnRef>
-          <a:fillRef idx="3">
-            <a:schemeClr val="accent1"/>
-          </a:fillRef>
-          <a:effectRef idx="2">
-            <a:schemeClr val="accent1"/>
-          </a:effectRef>
-          <a:fontRef idx="minor">
-            <a:schemeClr val="lt1"/>
-          </a:fontRef>
-        </p:style>
-        <p:txBody>
-          <a:bodyPr rtlCol="0" anchor="ctr"/>
-          <a:lstStyle/>
-          <a:p>
-            <a:pPr algn="ctr"/>
-          </a:p>
-        </p:txBody>
-      </p:sp>
-      <p:sp>
-        <p:nvSpPr>
-          <p:cNvPr id="9" name="TextBox 8"/>
-          <p:cNvSpPr txBox="1"/>
-          <p:nvPr/>
-        </p:nvSpPr>
-        <p:spPr>
-          <a:xfrm>
-            <a:off x="1371600" y="3188208"/>
-            <a:ext cx="9997135" cy="457200"/>
-          </a:xfrm>
-          <a:prstGeom prst="rect">
-            <a:avLst/>
-          </a:prstGeom>
-          <a:noFill/>
-        </p:spPr>
-        <p:txBody>
-          <a:bodyPr wrap="square" anchor="t" lIns="0" rIns="0" tIns="0" bIns="0">
-            <a:spAutoFit/>
-          </a:bodyPr>
-          <a:lstStyle/>
-          <a:p>
-            <a:pPr algn="l">
-              <a:lnSpc>
-                <a:spcPct val="110000"/>
-              </a:lnSpc>
-            </a:pPr>
-            <a:r>
-              <a:rPr sz="1600" b="1">
-                <a:solidFill>
-                  <a:srgbClr val="1C2A33"/>
-                </a:solidFill>
-                <a:latin typeface="微软雅黑"/>
-                <a:ea typeface="微软雅黑"/>
-                <a:cs typeface="微软雅黑"/>
-              </a:rPr>
-              <a:t/>
-            </a:r>
-          </a:p>
-        </p:txBody>
-      </p:sp>
-      <p:sp>
-        <p:nvSpPr>
-          <p:cNvPr id="10" name="TextBox 9"/>
-          <p:cNvSpPr txBox="1"/>
-          <p:nvPr/>
-        </p:nvSpPr>
-        <p:spPr>
-          <a:xfrm>
-            <a:off x="1371600" y="3627120"/>
-            <a:ext cx="9997135" cy="957072"/>
-          </a:xfrm>
-          <a:prstGeom prst="rect">
-            <a:avLst/>
-          </a:prstGeom>
-          <a:noFill/>
-        </p:spPr>
-        <p:txBody>
-          <a:bodyPr wrap="square" anchor="t" lIns="0" rIns="0" tIns="0" bIns="0">
-            <a:spAutoFit/>
-          </a:bodyPr>
-          <a:lstStyle/>
-          <a:p>
-            <a:pPr algn="l">
-              <a:lnSpc>
-                <a:spcPct val="128000"/>
-              </a:lnSpc>
-            </a:pPr>
-            <a:r>
-              <a:rPr sz="1300" b="0">
-                <a:solidFill>
-                  <a:srgbClr val="1C2A33"/>
-                </a:solidFill>
-                <a:latin typeface="楷体"/>
-                <a:ea typeface="楷体"/>
-                <a:cs typeface="楷体"/>
-              </a:rPr>
-              <a:t>② 驳五罪：侵官/生事/征利/拒谏/致怨，逐条破。</a:t>
-            </a:r>
-          </a:p>
-        </p:txBody>
-      </p:sp>
-      <p:sp>
-        <p:nvSpPr>
-          <p:cNvPr id="11" name="Rounded Rectangle 10"/>
-          <p:cNvSpPr/>
-          <p:nvPr/>
-        </p:nvSpPr>
-        <p:spPr>
-          <a:xfrm>
-            <a:off x="640080" y="4785360"/>
-            <a:ext cx="10911535" cy="1597152"/>
-          </a:xfrm>
-          <a:prstGeom prst="roundRect">
-            <a:avLst/>
-          </a:prstGeom>
-          <a:solidFill>
-            <a:srgbClr val="FFFFFF"/>
-          </a:solidFill>
-          <a:ln w="22860">
-            <a:solidFill>
-              <a:srgbClr val="C8A86B"/>
-            </a:solidFill>
-          </a:ln>
-          <a:effectLst/>
-        </p:spPr>
-        <p:style>
-          <a:lnRef idx="1">
-            <a:schemeClr val="accent1"/>
-          </a:lnRef>
-          <a:fillRef idx="3">
-            <a:schemeClr val="accent1"/>
-          </a:fillRef>
-          <a:effectRef idx="2">
-            <a:schemeClr val="accent1"/>
-          </a:effectRef>
-          <a:fontRef idx="minor">
-            <a:schemeClr val="lt1"/>
-          </a:fontRef>
-        </p:style>
-        <p:txBody>
-          <a:bodyPr rtlCol="0" anchor="ctr"/>
-          <a:lstStyle/>
-          <a:p>
-            <a:pPr algn="ctr"/>
-          </a:p>
-        </p:txBody>
-      </p:sp>
-      <p:sp>
-        <p:nvSpPr>
-          <p:cNvPr id="12" name="TextBox 11"/>
-          <p:cNvSpPr txBox="1"/>
-          <p:nvPr/>
-        </p:nvSpPr>
-        <p:spPr>
-          <a:xfrm>
-            <a:off x="1371600" y="4895088"/>
-            <a:ext cx="9997135" cy="457200"/>
-          </a:xfrm>
-          <a:prstGeom prst="rect">
-            <a:avLst/>
-          </a:prstGeom>
-          <a:noFill/>
-        </p:spPr>
-        <p:txBody>
-          <a:bodyPr wrap="square" anchor="t" lIns="0" rIns="0" tIns="0" bIns="0">
-            <a:spAutoFit/>
-          </a:bodyPr>
-          <a:lstStyle/>
-          <a:p>
-            <a:pPr algn="l">
-              <a:lnSpc>
-                <a:spcPct val="110000"/>
-              </a:lnSpc>
-            </a:pPr>
-            <a:r>
-              <a:rPr sz="1600" b="1">
-                <a:solidFill>
-                  <a:srgbClr val="1C2A33"/>
-                </a:solidFill>
-                <a:latin typeface="微软雅黑"/>
-                <a:ea typeface="微软雅黑"/>
-                <a:cs typeface="微软雅黑"/>
-              </a:rPr>
-              <a:t/>
-            </a:r>
-          </a:p>
-        </p:txBody>
-      </p:sp>
-      <p:sp>
-        <p:nvSpPr>
-          <p:cNvPr id="13" name="TextBox 12"/>
-          <p:cNvSpPr txBox="1"/>
-          <p:nvPr/>
-        </p:nvSpPr>
-        <p:spPr>
-          <a:xfrm>
-            <a:off x="1371600" y="5334000"/>
-            <a:ext cx="9997135" cy="957072"/>
-          </a:xfrm>
-          <a:prstGeom prst="rect">
-            <a:avLst/>
-          </a:prstGeom>
-          <a:noFill/>
-        </p:spPr>
-        <p:txBody>
-          <a:bodyPr wrap="square" anchor="t" lIns="0" rIns="0" tIns="0" bIns="0">
-            <a:spAutoFit/>
-          </a:bodyPr>
-          <a:lstStyle/>
-          <a:p>
-            <a:pPr algn="l">
-              <a:lnSpc>
-                <a:spcPct val="128000"/>
-              </a:lnSpc>
-            </a:pPr>
-            <a:r>
-              <a:rPr sz="1300" b="0">
-                <a:solidFill>
-                  <a:srgbClr val="1C2A33"/>
-                </a:solidFill>
-                <a:latin typeface="楷体"/>
-                <a:ea typeface="楷体"/>
-                <a:cs typeface="楷体"/>
-              </a:rPr>
-              <a:t>③ 立场：为天下理财，非私。</a:t>
-            </a:r>
-          </a:p>
-        </p:txBody>
-      </p:sp>
-      <p:sp>
-        <p:nvSpPr>
-          <p:cNvPr id="14" name="TextBox 13"/>
+              <a:t>立场：为天下理财，非私。</a:t>
+            </a:r>
+          </a:p>
+        </p:txBody>
+      </p:sp>
+      <p:sp>
+        <p:nvSpPr>
+          <p:cNvPr id="15" name="TextBox 14"/>
           <p:cNvSpPr txBox="1"/>
           <p:nvPr/>
         </p:nvSpPr>
@@ -5391,13 +5668,13 @@
             <a:r>
               <a:rPr sz="1300" b="1">
                 <a:solidFill>
-                  <a:srgbClr val="2E7D6B"/>
+                  <a:srgbClr val="B23A2A"/>
                 </a:solidFill>
                 <a:latin typeface="微软雅黑"/>
                 <a:ea typeface="微软雅黑"/>
                 <a:cs typeface="微软雅黑"/>
               </a:rPr>
-              <a:t>学习路径</a:t>
+              <a:t>方法</a:t>
             </a:r>
           </a:p>
         </p:txBody>
@@ -5417,7 +5694,7 @@
             <a:avLst/>
           </a:prstGeom>
           <a:solidFill>
-            <a:srgbClr val="2E7D6B"/>
+            <a:srgbClr val="B23A2A"/>
           </a:solidFill>
           <a:ln>
             <a:noFill/>
@@ -5448,14 +5725,263 @@
       </p:sp>
       <p:sp>
         <p:nvSpPr>
-          <p:cNvPr id="5" name="Rounded Rectangle 4"/>
+          <p:cNvPr id="5" name="TextBox 4"/>
+          <p:cNvSpPr txBox="1"/>
+          <p:nvPr/>
+        </p:nvSpPr>
+        <p:spPr>
+          <a:xfrm>
+            <a:off x="640080" y="1325880"/>
+            <a:ext cx="10911535" cy="548640"/>
+          </a:xfrm>
+          <a:prstGeom prst="rect">
+            <a:avLst/>
+          </a:prstGeom>
+          <a:noFill/>
+        </p:spPr>
+        <p:txBody>
+          <a:bodyPr wrap="square" anchor="t" lIns="0" rIns="0" tIns="0" bIns="0">
+            <a:spAutoFit/>
+          </a:bodyPr>
+          <a:lstStyle/>
+          <a:p>
+            <a:pPr algn="l"/>
+            <a:r>
+              <a:rPr sz="2600" b="1">
+                <a:solidFill>
+                  <a:srgbClr val="1C2A33"/>
+                </a:solidFill>
+                <a:latin typeface="楷体"/>
+                <a:ea typeface="楷体"/>
+                <a:cs typeface="楷体"/>
+              </a:rPr>
+              <a:t>学习路径与方法</a:t>
+            </a:r>
+          </a:p>
+        </p:txBody>
+      </p:sp>
+      <p:sp>
+        <p:nvSpPr>
+          <p:cNvPr id="6" name="Rounded Rectangle 5"/>
           <p:cNvSpPr/>
           <p:nvPr/>
         </p:nvSpPr>
         <p:spPr>
           <a:xfrm>
-            <a:off x="640080" y="1371600"/>
-            <a:ext cx="10911535" cy="685800"/>
+            <a:off x="640080" y="2194560"/>
+            <a:ext cx="2453563" cy="3931920"/>
+          </a:xfrm>
+          <a:prstGeom prst="roundRect">
+            <a:avLst/>
+          </a:prstGeom>
+          <a:solidFill>
+            <a:srgbClr val="FFFFFF"/>
+          </a:solidFill>
+          <a:ln w="22860">
+            <a:solidFill>
+              <a:srgbClr val="B23A2A"/>
+            </a:solidFill>
+          </a:ln>
+          <a:effectLst/>
+        </p:spPr>
+        <p:style>
+          <a:lnRef idx="1">
+            <a:schemeClr val="accent1"/>
+          </a:lnRef>
+          <a:fillRef idx="3">
+            <a:schemeClr val="accent1"/>
+          </a:fillRef>
+          <a:effectRef idx="2">
+            <a:schemeClr val="accent1"/>
+          </a:effectRef>
+          <a:fontRef idx="minor">
+            <a:schemeClr val="lt1"/>
+          </a:fontRef>
+        </p:style>
+        <p:txBody>
+          <a:bodyPr rtlCol="0" anchor="ctr"/>
+          <a:lstStyle/>
+          <a:p>
+            <a:pPr algn="ctr"/>
+          </a:p>
+        </p:txBody>
+      </p:sp>
+      <p:sp>
+        <p:nvSpPr>
+          <p:cNvPr id="7" name="Oval 6"/>
+          <p:cNvSpPr/>
+          <p:nvPr/>
+        </p:nvSpPr>
+        <p:spPr>
+          <a:xfrm>
+            <a:off x="841248" y="2395728"/>
+            <a:ext cx="457200" cy="457200"/>
+          </a:xfrm>
+          <a:prstGeom prst="ellipse">
+            <a:avLst/>
+          </a:prstGeom>
+          <a:solidFill>
+            <a:srgbClr val="B23A2A"/>
+          </a:solidFill>
+          <a:ln>
+            <a:noFill/>
+          </a:ln>
+          <a:effectLst/>
+        </p:spPr>
+        <p:style>
+          <a:lnRef idx="1">
+            <a:schemeClr val="accent1"/>
+          </a:lnRef>
+          <a:fillRef idx="3">
+            <a:schemeClr val="accent1"/>
+          </a:fillRef>
+          <a:effectRef idx="2">
+            <a:schemeClr val="accent1"/>
+          </a:effectRef>
+          <a:fontRef idx="minor">
+            <a:schemeClr val="lt1"/>
+          </a:fontRef>
+        </p:style>
+        <p:txBody>
+          <a:bodyPr rtlCol="0" anchor="ctr"/>
+          <a:lstStyle/>
+          <a:p>
+            <a:pPr algn="ctr"/>
+          </a:p>
+        </p:txBody>
+      </p:sp>
+      <p:sp>
+        <p:nvSpPr>
+          <p:cNvPr id="8" name="TextBox 7"/>
+          <p:cNvSpPr txBox="1"/>
+          <p:nvPr/>
+        </p:nvSpPr>
+        <p:spPr>
+          <a:xfrm>
+            <a:off x="841248" y="2441448"/>
+            <a:ext cx="457200" cy="384048"/>
+          </a:xfrm>
+          <a:prstGeom prst="rect">
+            <a:avLst/>
+          </a:prstGeom>
+          <a:noFill/>
+        </p:spPr>
+        <p:txBody>
+          <a:bodyPr wrap="square" anchor="t" lIns="0" rIns="0" tIns="0" bIns="0">
+            <a:spAutoFit/>
+          </a:bodyPr>
+          <a:lstStyle/>
+          <a:p>
+            <a:pPr algn="ctr"/>
+            <a:r>
+              <a:rPr sz="1600" b="1">
+                <a:solidFill>
+                  <a:srgbClr val="FFFFFF"/>
+                </a:solidFill>
+                <a:latin typeface="微软雅黑"/>
+                <a:ea typeface="微软雅黑"/>
+                <a:cs typeface="微软雅黑"/>
+              </a:rPr>
+              <a:t>1</a:t>
+            </a:r>
+          </a:p>
+        </p:txBody>
+      </p:sp>
+      <p:sp>
+        <p:nvSpPr>
+          <p:cNvPr id="9" name="TextBox 8"/>
+          <p:cNvSpPr txBox="1"/>
+          <p:nvPr/>
+        </p:nvSpPr>
+        <p:spPr>
+          <a:xfrm>
+            <a:off x="896112" y="2944368"/>
+            <a:ext cx="1996363" cy="914400"/>
+          </a:xfrm>
+          <a:prstGeom prst="rect">
+            <a:avLst/>
+          </a:prstGeom>
+          <a:noFill/>
+        </p:spPr>
+        <p:txBody>
+          <a:bodyPr wrap="square" anchor="t" lIns="0" rIns="0" tIns="0" bIns="0">
+            <a:spAutoFit/>
+          </a:bodyPr>
+          <a:lstStyle/>
+          <a:p>
+            <a:pPr algn="l">
+              <a:lnSpc>
+                <a:spcPct val="125000"/>
+              </a:lnSpc>
+            </a:pPr>
+            <a:r>
+              <a:rPr sz="1500" b="1">
+                <a:solidFill>
+                  <a:srgbClr val="1C2A33"/>
+                </a:solidFill>
+                <a:latin typeface="微软雅黑"/>
+                <a:ea typeface="微软雅黑"/>
+                <a:cs typeface="微软雅黑"/>
+              </a:rPr>
+              <a:t>原则标尺法（名实）。</a:t>
+            </a:r>
+          </a:p>
+        </p:txBody>
+      </p:sp>
+      <p:sp>
+        <p:nvSpPr>
+          <p:cNvPr id="10" name="TextBox 9"/>
+          <p:cNvSpPr txBox="1"/>
+          <p:nvPr/>
+        </p:nvSpPr>
+        <p:spPr>
+          <a:xfrm>
+            <a:off x="896112" y="3977640"/>
+            <a:ext cx="1996363" cy="2011680"/>
+          </a:xfrm>
+          <a:prstGeom prst="rect">
+            <a:avLst/>
+          </a:prstGeom>
+          <a:noFill/>
+        </p:spPr>
+        <p:txBody>
+          <a:bodyPr wrap="square" anchor="t" lIns="0" rIns="0" tIns="0" bIns="0">
+            <a:spAutoFit/>
+          </a:bodyPr>
+          <a:lstStyle/>
+          <a:p>
+            <a:pPr algn="l">
+              <a:lnSpc>
+                <a:spcPct val="135000"/>
+              </a:lnSpc>
+              <a:spcAft>
+                <a:spcPts val="400"/>
+              </a:spcAft>
+            </a:pPr>
+            <a:r>
+              <a:rPr sz="1300" b="0">
+                <a:solidFill>
+                  <a:srgbClr val="1C2A33"/>
+                </a:solidFill>
+                <a:latin typeface="楷体"/>
+                <a:ea typeface="楷体"/>
+                <a:cs typeface="楷体"/>
+              </a:rPr>
+              <a:t>原则标尺法（名实）。</a:t>
+            </a:r>
+          </a:p>
+        </p:txBody>
+      </p:sp>
+      <p:sp>
+        <p:nvSpPr>
+          <p:cNvPr id="11" name="Rounded Rectangle 10"/>
+          <p:cNvSpPr/>
+          <p:nvPr/>
+        </p:nvSpPr>
+        <p:spPr>
+          <a:xfrm>
+            <a:off x="3459403" y="2194560"/>
+            <a:ext cx="2453563" cy="3931920"/>
           </a:xfrm>
           <a:prstGeom prst="roundRect">
             <a:avLst/>
@@ -5494,13 +6020,13 @@
       </p:sp>
       <p:sp>
         <p:nvSpPr>
-          <p:cNvPr id="6" name="Oval 5"/>
+          <p:cNvPr id="12" name="Oval 11"/>
           <p:cNvSpPr/>
           <p:nvPr/>
         </p:nvSpPr>
         <p:spPr>
           <a:xfrm>
-            <a:off x="804672" y="1536192"/>
+            <a:off x="3660571" y="2395728"/>
             <a:ext cx="457200" cy="457200"/>
           </a:xfrm>
           <a:prstGeom prst="ellipse">
@@ -5538,13 +6064,13 @@
       </p:sp>
       <p:sp>
         <p:nvSpPr>
-          <p:cNvPr id="7" name="TextBox 6"/>
+          <p:cNvPr id="13" name="TextBox 12"/>
           <p:cNvSpPr txBox="1"/>
           <p:nvPr/>
         </p:nvSpPr>
         <p:spPr>
           <a:xfrm>
-            <a:off x="804672" y="1591056"/>
+            <a:off x="3660571" y="2441448"/>
             <a:ext cx="457200" cy="384048"/>
           </a:xfrm>
           <a:prstGeom prst="rect">
@@ -5568,21 +6094,21 @@
                 <a:ea typeface="微软雅黑"/>
                 <a:cs typeface="微软雅黑"/>
               </a:rPr>
-              <a:t>1</a:t>
-            </a:r>
-          </a:p>
-        </p:txBody>
-      </p:sp>
-      <p:sp>
-        <p:nvSpPr>
-          <p:cNvPr id="8" name="TextBox 7"/>
+              <a:t>2</a:t>
+            </a:r>
+          </a:p>
+        </p:txBody>
+      </p:sp>
+      <p:sp>
+        <p:nvSpPr>
+          <p:cNvPr id="14" name="TextBox 13"/>
           <p:cNvSpPr txBox="1"/>
           <p:nvPr/>
         </p:nvSpPr>
         <p:spPr>
           <a:xfrm>
-            <a:off x="1371600" y="1481328"/>
-            <a:ext cx="9997135" cy="484632"/>
+            <a:off x="3715435" y="2944368"/>
+            <a:ext cx="1996363" cy="914400"/>
           </a:xfrm>
           <a:prstGeom prst="rect">
             <a:avLst/>
@@ -5597,11 +6123,11 @@
           <a:p>
             <a:pPr algn="l">
               <a:lnSpc>
-                <a:spcPct val="110000"/>
+                <a:spcPct val="125000"/>
               </a:lnSpc>
             </a:pPr>
             <a:r>
-              <a:rPr sz="1600" b="1">
+              <a:rPr sz="1500" b="1">
                 <a:solidFill>
                   <a:srgbClr val="1C2A33"/>
                 </a:solidFill>
@@ -5609,21 +6135,65 @@
                 <a:ea typeface="微软雅黑"/>
                 <a:cs typeface="微软雅黑"/>
               </a:rPr>
-              <a:t>Step 1 导入</a:t>
-            </a:r>
-          </a:p>
-        </p:txBody>
-      </p:sp>
-      <p:sp>
-        <p:nvSpPr>
-          <p:cNvPr id="9" name="Rounded Rectangle 8"/>
+              <a:t>逐条破除法。</a:t>
+            </a:r>
+          </a:p>
+        </p:txBody>
+      </p:sp>
+      <p:sp>
+        <p:nvSpPr>
+          <p:cNvPr id="15" name="TextBox 14"/>
+          <p:cNvSpPr txBox="1"/>
+          <p:nvPr/>
+        </p:nvSpPr>
+        <p:spPr>
+          <a:xfrm>
+            <a:off x="3715435" y="3977640"/>
+            <a:ext cx="1996363" cy="2011680"/>
+          </a:xfrm>
+          <a:prstGeom prst="rect">
+            <a:avLst/>
+          </a:prstGeom>
+          <a:noFill/>
+        </p:spPr>
+        <p:txBody>
+          <a:bodyPr wrap="square" anchor="t" lIns="0" rIns="0" tIns="0" bIns="0">
+            <a:spAutoFit/>
+          </a:bodyPr>
+          <a:lstStyle/>
+          <a:p>
+            <a:pPr algn="l">
+              <a:lnSpc>
+                <a:spcPct val="135000"/>
+              </a:lnSpc>
+              <a:spcAft>
+                <a:spcPts val="400"/>
+              </a:spcAft>
+            </a:pPr>
+            <a:r>
+              <a:rPr sz="1300" b="0">
+                <a:solidFill>
+                  <a:srgbClr val="1C2A33"/>
+                </a:solidFill>
+                <a:latin typeface="楷体"/>
+                <a:ea typeface="楷体"/>
+                <a:cs typeface="楷体"/>
+              </a:rPr>
+              <a:t>逐条破除法。</a:t>
+            </a:r>
+          </a:p>
+        </p:txBody>
+      </p:sp>
+      <p:sp>
+        <p:nvSpPr>
+          <p:cNvPr id="16" name="Rounded Rectangle 15"/>
           <p:cNvSpPr/>
           <p:nvPr/>
         </p:nvSpPr>
         <p:spPr>
           <a:xfrm>
-            <a:off x="640080" y="2194560"/>
-            <a:ext cx="10911535" cy="685800"/>
+            <a:off x="6278727" y="2194560"/>
+            <a:ext cx="2453563" cy="3931920"/>
           </a:xfrm>
           <a:prstGeom prst="roundRect">
             <a:avLst/>
@@ -5633,7 +6203,7 @@
           </a:solidFill>
           <a:ln w="22860">
             <a:solidFill>
-              <a:srgbClr val="2E7D6B"/>
+              <a:srgbClr val="C8A86B"/>
             </a:solidFill>
           </a:ln>
           <a:effectLst/>
@@ -5662,20 +6232,20 @@
       </p:sp>
       <p:sp>
         <p:nvSpPr>
-          <p:cNvPr id="10" name="Oval 9"/>
+          <p:cNvPr id="17" name="Oval 16"/>
           <p:cNvSpPr/>
           <p:nvPr/>
         </p:nvSpPr>
         <p:spPr>
           <a:xfrm>
-            <a:off x="804672" y="2359152"/>
+            <a:off x="6479895" y="2395728"/>
             <a:ext cx="457200" cy="457200"/>
           </a:xfrm>
           <a:prstGeom prst="ellipse">
             <a:avLst/>
           </a:prstGeom>
           <a:solidFill>
-            <a:srgbClr val="2E7D6B"/>
+            <a:srgbClr val="C8A86B"/>
           </a:solidFill>
           <a:ln>
             <a:noFill/>
@@ -5706,13 +6276,13 @@
       </p:sp>
       <p:sp>
         <p:nvSpPr>
-          <p:cNvPr id="11" name="TextBox 10"/>
+          <p:cNvPr id="18" name="TextBox 17"/>
           <p:cNvSpPr txBox="1"/>
           <p:nvPr/>
         </p:nvSpPr>
         <p:spPr>
           <a:xfrm>
-            <a:off x="804672" y="2414016"/>
+            <a:off x="6479895" y="2441448"/>
             <a:ext cx="457200" cy="384048"/>
           </a:xfrm>
           <a:prstGeom prst="rect">
@@ -5736,21 +6306,21 @@
                 <a:ea typeface="微软雅黑"/>
                 <a:cs typeface="微软雅黑"/>
               </a:rPr>
-              <a:t>2</a:t>
-            </a:r>
-          </a:p>
-        </p:txBody>
-      </p:sp>
-      <p:sp>
-        <p:nvSpPr>
-          <p:cNvPr id="12" name="TextBox 11"/>
+              <a:t>3</a:t>
+            </a:r>
+          </a:p>
+        </p:txBody>
+      </p:sp>
+      <p:sp>
+        <p:nvSpPr>
+          <p:cNvPr id="19" name="TextBox 18"/>
           <p:cNvSpPr txBox="1"/>
           <p:nvPr/>
         </p:nvSpPr>
         <p:spPr>
           <a:xfrm>
-            <a:off x="1371600" y="2304288"/>
-            <a:ext cx="9997135" cy="484632"/>
+            <a:off x="6534759" y="2944368"/>
+            <a:ext cx="1996363" cy="914400"/>
           </a:xfrm>
           <a:prstGeom prst="rect">
             <a:avLst/>
@@ -5765,11 +6335,11 @@
           <a:p>
             <a:pPr algn="l">
               <a:lnSpc>
-                <a:spcPct val="110000"/>
+                <a:spcPct val="125000"/>
               </a:lnSpc>
             </a:pPr>
             <a:r>
-              <a:rPr sz="1600" b="1">
+              <a:rPr sz="1500" b="1">
                 <a:solidFill>
                   <a:srgbClr val="1C2A33"/>
                 </a:solidFill>
@@ -5777,21 +6347,65 @@
                 <a:ea typeface="微软雅黑"/>
                 <a:cs typeface="微软雅黑"/>
               </a:rPr>
-              <a:t>Step 2 原则</a:t>
-            </a:r>
-          </a:p>
-        </p:txBody>
-      </p:sp>
-      <p:sp>
-        <p:nvSpPr>
-          <p:cNvPr id="13" name="Rounded Rectangle 12"/>
+              <a:t>立破关系法。</a:t>
+            </a:r>
+          </a:p>
+        </p:txBody>
+      </p:sp>
+      <p:sp>
+        <p:nvSpPr>
+          <p:cNvPr id="20" name="TextBox 19"/>
+          <p:cNvSpPr txBox="1"/>
+          <p:nvPr/>
+        </p:nvSpPr>
+        <p:spPr>
+          <a:xfrm>
+            <a:off x="6534759" y="3977640"/>
+            <a:ext cx="1996363" cy="2011680"/>
+          </a:xfrm>
+          <a:prstGeom prst="rect">
+            <a:avLst/>
+          </a:prstGeom>
+          <a:noFill/>
+        </p:spPr>
+        <p:txBody>
+          <a:bodyPr wrap="square" anchor="t" lIns="0" rIns="0" tIns="0" bIns="0">
+            <a:spAutoFit/>
+          </a:bodyPr>
+          <a:lstStyle/>
+          <a:p>
+            <a:pPr algn="l">
+              <a:lnSpc>
+                <a:spcPct val="135000"/>
+              </a:lnSpc>
+              <a:spcAft>
+                <a:spcPts val="400"/>
+              </a:spcAft>
+            </a:pPr>
+            <a:r>
+              <a:rPr sz="1300" b="0">
+                <a:solidFill>
+                  <a:srgbClr val="1C2A33"/>
+                </a:solidFill>
+                <a:latin typeface="楷体"/>
+                <a:ea typeface="楷体"/>
+                <a:cs typeface="楷体"/>
+              </a:rPr>
+              <a:t>立破关系法。</a:t>
+            </a:r>
+          </a:p>
+        </p:txBody>
+      </p:sp>
+      <p:sp>
+        <p:nvSpPr>
+          <p:cNvPr id="21" name="Rounded Rectangle 20"/>
           <p:cNvSpPr/>
           <p:nvPr/>
         </p:nvSpPr>
         <p:spPr>
           <a:xfrm>
-            <a:off x="640080" y="3017520"/>
-            <a:ext cx="10911535" cy="685800"/>
+            <a:off x="9098051" y="2194560"/>
+            <a:ext cx="2453563" cy="3931920"/>
           </a:xfrm>
           <a:prstGeom prst="roundRect">
             <a:avLst/>
@@ -5801,7 +6415,7 @@
           </a:solidFill>
           <a:ln w="22860">
             <a:solidFill>
-              <a:srgbClr val="2E7D6B"/>
+              <a:srgbClr val="6B6258"/>
             </a:solidFill>
           </a:ln>
           <a:effectLst/>
@@ -5830,20 +6444,20 @@
       </p:sp>
       <p:sp>
         <p:nvSpPr>
-          <p:cNvPr id="14" name="Oval 13"/>
+          <p:cNvPr id="22" name="Oval 21"/>
           <p:cNvSpPr/>
           <p:nvPr/>
         </p:nvSpPr>
         <p:spPr>
           <a:xfrm>
-            <a:off x="804672" y="3182112"/>
+            <a:off x="9299219" y="2395728"/>
             <a:ext cx="457200" cy="457200"/>
           </a:xfrm>
           <a:prstGeom prst="ellipse">
             <a:avLst/>
           </a:prstGeom>
           <a:solidFill>
-            <a:srgbClr val="2E7D6B"/>
+            <a:srgbClr val="6B6258"/>
           </a:solidFill>
           <a:ln>
             <a:noFill/>
@@ -5874,181 +6488,13 @@
       </p:sp>
       <p:sp>
         <p:nvSpPr>
-          <p:cNvPr id="15" name="TextBox 14"/>
+          <p:cNvPr id="23" name="TextBox 22"/>
           <p:cNvSpPr txBox="1"/>
           <p:nvPr/>
         </p:nvSpPr>
         <p:spPr>
           <a:xfrm>
-            <a:off x="804672" y="3236976"/>
-            <a:ext cx="457200" cy="384048"/>
-          </a:xfrm>
-          <a:prstGeom prst="rect">
-            <a:avLst/>
-          </a:prstGeom>
-          <a:noFill/>
-        </p:spPr>
-        <p:txBody>
-          <a:bodyPr wrap="square" anchor="t" lIns="0" rIns="0" tIns="0" bIns="0">
-            <a:spAutoFit/>
-          </a:bodyPr>
-          <a:lstStyle/>
-          <a:p>
-            <a:pPr algn="ctr"/>
-            <a:r>
-              <a:rPr sz="1600" b="1">
-                <a:solidFill>
-                  <a:srgbClr val="FFFFFF"/>
-                </a:solidFill>
-                <a:latin typeface="微软雅黑"/>
-                <a:ea typeface="微软雅黑"/>
-                <a:cs typeface="微软雅黑"/>
-              </a:rPr>
-              <a:t>3</a:t>
-            </a:r>
-          </a:p>
-        </p:txBody>
-      </p:sp>
-      <p:sp>
-        <p:nvSpPr>
-          <p:cNvPr id="16" name="TextBox 15"/>
-          <p:cNvSpPr txBox="1"/>
-          <p:nvPr/>
-        </p:nvSpPr>
-        <p:spPr>
-          <a:xfrm>
-            <a:off x="1371600" y="3127248"/>
-            <a:ext cx="9997135" cy="484632"/>
-          </a:xfrm>
-          <a:prstGeom prst="rect">
-            <a:avLst/>
-          </a:prstGeom>
-          <a:noFill/>
-        </p:spPr>
-        <p:txBody>
-          <a:bodyPr wrap="square" anchor="t" lIns="0" rIns="0" tIns="0" bIns="0">
-            <a:spAutoFit/>
-          </a:bodyPr>
-          <a:lstStyle/>
-          <a:p>
-            <a:pPr algn="l">
-              <a:lnSpc>
-                <a:spcPct val="110000"/>
-              </a:lnSpc>
-            </a:pPr>
-            <a:r>
-              <a:rPr sz="1600" b="1">
-                <a:solidFill>
-                  <a:srgbClr val="1C2A33"/>
-                </a:solidFill>
-                <a:latin typeface="微软雅黑"/>
-                <a:ea typeface="微软雅黑"/>
-                <a:cs typeface="微软雅黑"/>
-              </a:rPr>
-              <a:t>Step 3 驳序</a:t>
-            </a:r>
-          </a:p>
-        </p:txBody>
-      </p:sp>
-      <p:sp>
-        <p:nvSpPr>
-          <p:cNvPr id="17" name="Rounded Rectangle 16"/>
-          <p:cNvSpPr/>
-          <p:nvPr/>
-        </p:nvSpPr>
-        <p:spPr>
-          <a:xfrm>
-            <a:off x="640080" y="3840480"/>
-            <a:ext cx="10911535" cy="685800"/>
-          </a:xfrm>
-          <a:prstGeom prst="roundRect">
-            <a:avLst/>
-          </a:prstGeom>
-          <a:solidFill>
-            <a:srgbClr val="FFFFFF"/>
-          </a:solidFill>
-          <a:ln w="22860">
-            <a:solidFill>
-              <a:srgbClr val="2E7D6B"/>
-            </a:solidFill>
-          </a:ln>
-          <a:effectLst/>
-        </p:spPr>
-        <p:style>
-          <a:lnRef idx="1">
-            <a:schemeClr val="accent1"/>
-          </a:lnRef>
-          <a:fillRef idx="3">
-            <a:schemeClr val="accent1"/>
-          </a:fillRef>
-          <a:effectRef idx="2">
-            <a:schemeClr val="accent1"/>
-          </a:effectRef>
-          <a:fontRef idx="minor">
-            <a:schemeClr val="lt1"/>
-          </a:fontRef>
-        </p:style>
-        <p:txBody>
-          <a:bodyPr rtlCol="0" anchor="ctr"/>
-          <a:lstStyle/>
-          <a:p>
-            <a:pPr algn="ctr"/>
-          </a:p>
-        </p:txBody>
-      </p:sp>
-      <p:sp>
-        <p:nvSpPr>
-          <p:cNvPr id="18" name="Oval 17"/>
-          <p:cNvSpPr/>
-          <p:nvPr/>
-        </p:nvSpPr>
-        <p:spPr>
-          <a:xfrm>
-            <a:off x="804672" y="4005072"/>
-            <a:ext cx="457200" cy="457200"/>
-          </a:xfrm>
-          <a:prstGeom prst="ellipse">
-            <a:avLst/>
-          </a:prstGeom>
-          <a:solidFill>
-            <a:srgbClr val="2E7D6B"/>
-          </a:solidFill>
-          <a:ln>
-            <a:noFill/>
-          </a:ln>
-          <a:effectLst/>
-        </p:spPr>
-        <p:style>
-          <a:lnRef idx="1">
-            <a:schemeClr val="accent1"/>
-          </a:lnRef>
-          <a:fillRef idx="3">
-            <a:schemeClr val="accent1"/>
-          </a:fillRef>
-          <a:effectRef idx="2">
-            <a:schemeClr val="accent1"/>
-          </a:effectRef>
-          <a:fontRef idx="minor">
-            <a:schemeClr val="lt1"/>
-          </a:fontRef>
-        </p:style>
-        <p:txBody>
-          <a:bodyPr rtlCol="0" anchor="ctr"/>
-          <a:lstStyle/>
-          <a:p>
-            <a:pPr algn="ctr"/>
-          </a:p>
-        </p:txBody>
-      </p:sp>
-      <p:sp>
-        <p:nvSpPr>
-          <p:cNvPr id="19" name="TextBox 18"/>
-          <p:cNvSpPr txBox="1"/>
-          <p:nvPr/>
-        </p:nvSpPr>
-        <p:spPr>
-          <a:xfrm>
-            <a:off x="804672" y="4059936"/>
+            <a:off x="9299219" y="2441448"/>
             <a:ext cx="457200" cy="384048"/>
           </a:xfrm>
           <a:prstGeom prst="rect">
@@ -6079,14 +6525,14 @@
       </p:sp>
       <p:sp>
         <p:nvSpPr>
-          <p:cNvPr id="20" name="TextBox 19"/>
+          <p:cNvPr id="24" name="TextBox 23"/>
           <p:cNvSpPr txBox="1"/>
           <p:nvPr/>
         </p:nvSpPr>
         <p:spPr>
           <a:xfrm>
-            <a:off x="1371600" y="3950208"/>
-            <a:ext cx="9997135" cy="484632"/>
+            <a:off x="9354083" y="2944368"/>
+            <a:ext cx="1996363" cy="914400"/>
           </a:xfrm>
           <a:prstGeom prst="rect">
             <a:avLst/>
@@ -6101,11 +6547,11 @@
           <a:p>
             <a:pPr algn="l">
               <a:lnSpc>
-                <a:spcPct val="110000"/>
+                <a:spcPct val="125000"/>
               </a:lnSpc>
             </a:pPr>
             <a:r>
-              <a:rPr sz="1600" b="1">
+              <a:rPr sz="1500" b="1">
                 <a:solidFill>
                   <a:srgbClr val="1C2A33"/>
                 </a:solidFill>
@@ -6113,111 +6559,21 @@
                 <a:ea typeface="微软雅黑"/>
                 <a:cs typeface="微软雅黑"/>
               </a:rPr>
-              <a:t>Step 4 逐破</a:t>
-            </a:r>
-          </a:p>
-        </p:txBody>
-      </p:sp>
-      <p:sp>
-        <p:nvSpPr>
-          <p:cNvPr id="21" name="Rounded Rectangle 20"/>
-          <p:cNvSpPr/>
-          <p:nvPr/>
-        </p:nvSpPr>
-        <p:spPr>
-          <a:xfrm>
-            <a:off x="640080" y="4663440"/>
-            <a:ext cx="10911535" cy="685800"/>
-          </a:xfrm>
-          <a:prstGeom prst="roundRect">
-            <a:avLst/>
-          </a:prstGeom>
-          <a:solidFill>
-            <a:srgbClr val="FFFFFF"/>
-          </a:solidFill>
-          <a:ln w="22860">
-            <a:solidFill>
-              <a:srgbClr val="2E7D6B"/>
-            </a:solidFill>
-          </a:ln>
-          <a:effectLst/>
-        </p:spPr>
-        <p:style>
-          <a:lnRef idx="1">
-            <a:schemeClr val="accent1"/>
-          </a:lnRef>
-          <a:fillRef idx="3">
-            <a:schemeClr val="accent1"/>
-          </a:fillRef>
-          <a:effectRef idx="2">
-            <a:schemeClr val="accent1"/>
-          </a:effectRef>
-          <a:fontRef idx="minor">
-            <a:schemeClr val="lt1"/>
-          </a:fontRef>
-        </p:style>
-        <p:txBody>
-          <a:bodyPr rtlCol="0" anchor="ctr"/>
-          <a:lstStyle/>
-          <a:p>
-            <a:pPr algn="ctr"/>
-          </a:p>
-        </p:txBody>
-      </p:sp>
-      <p:sp>
-        <p:nvSpPr>
-          <p:cNvPr id="22" name="Oval 21"/>
-          <p:cNvSpPr/>
-          <p:nvPr/>
-        </p:nvSpPr>
-        <p:spPr>
-          <a:xfrm>
-            <a:off x="804672" y="4828032"/>
-            <a:ext cx="457200" cy="457200"/>
-          </a:xfrm>
-          <a:prstGeom prst="ellipse">
-            <a:avLst/>
-          </a:prstGeom>
-          <a:solidFill>
-            <a:srgbClr val="2E7D6B"/>
-          </a:solidFill>
-          <a:ln>
-            <a:noFill/>
-          </a:ln>
-          <a:effectLst/>
-        </p:spPr>
-        <p:style>
-          <a:lnRef idx="1">
-            <a:schemeClr val="accent1"/>
-          </a:lnRef>
-          <a:fillRef idx="3">
-            <a:schemeClr val="accent1"/>
-          </a:fillRef>
-          <a:effectRef idx="2">
-            <a:schemeClr val="accent1"/>
-          </a:effectRef>
-          <a:fontRef idx="minor">
-            <a:schemeClr val="lt1"/>
-          </a:fontRef>
-        </p:style>
-        <p:txBody>
-          <a:bodyPr rtlCol="0" anchor="ctr"/>
-          <a:lstStyle/>
-          <a:p>
-            <a:pPr algn="ctr"/>
-          </a:p>
-        </p:txBody>
-      </p:sp>
-      <p:sp>
-        <p:nvSpPr>
-          <p:cNvPr id="23" name="TextBox 22"/>
+              <a:t>对比法（与十思）。</a:t>
+            </a:r>
+          </a:p>
+        </p:txBody>
+      </p:sp>
+      <p:sp>
+        <p:nvSpPr>
+          <p:cNvPr id="25" name="TextBox 24"/>
           <p:cNvSpPr txBox="1"/>
           <p:nvPr/>
         </p:nvSpPr>
         <p:spPr>
           <a:xfrm>
-            <a:off x="804672" y="4882896"/>
-            <a:ext cx="457200" cy="384048"/>
+            <a:off x="9354083" y="3977640"/>
+            <a:ext cx="1996363" cy="2011680"/>
           </a:xfrm>
           <a:prstGeom prst="rect">
             <a:avLst/>
@@ -6230,233 +6586,31 @@
           </a:bodyPr>
           <a:lstStyle/>
           <a:p>
-            <a:pPr algn="ctr"/>
-            <a:r>
-              <a:rPr sz="1600" b="1">
-                <a:solidFill>
-                  <a:srgbClr val="FFFFFF"/>
-                </a:solidFill>
-                <a:latin typeface="微软雅黑"/>
-                <a:ea typeface="微软雅黑"/>
-                <a:cs typeface="微软雅黑"/>
-              </a:rPr>
-              <a:t>5</a:t>
-            </a:r>
-          </a:p>
-        </p:txBody>
-      </p:sp>
-      <p:sp>
-        <p:nvSpPr>
-          <p:cNvPr id="24" name="TextBox 23"/>
-          <p:cNvSpPr txBox="1"/>
-          <p:nvPr/>
-        </p:nvSpPr>
-        <p:spPr>
-          <a:xfrm>
-            <a:off x="1371600" y="4773168"/>
-            <a:ext cx="9997135" cy="484632"/>
-          </a:xfrm>
-          <a:prstGeom prst="rect">
-            <a:avLst/>
-          </a:prstGeom>
-          <a:noFill/>
-        </p:spPr>
-        <p:txBody>
-          <a:bodyPr wrap="square" anchor="t" lIns="0" rIns="0" tIns="0" bIns="0">
-            <a:spAutoFit/>
-          </a:bodyPr>
-          <a:lstStyle/>
-          <a:p>
             <a:pPr algn="l">
               <a:lnSpc>
-                <a:spcPct val="110000"/>
+                <a:spcPct val="135000"/>
               </a:lnSpc>
+              <a:spcAft>
+                <a:spcPts val="400"/>
+              </a:spcAft>
             </a:pPr>
             <a:r>
-              <a:rPr sz="1600" b="1">
+              <a:rPr sz="1300" b="0">
                 <a:solidFill>
                   <a:srgbClr val="1C2A33"/>
                 </a:solidFill>
-                <a:latin typeface="微软雅黑"/>
-                <a:ea typeface="微软雅黑"/>
-                <a:cs typeface="微软雅黑"/>
+                <a:latin typeface="楷体"/>
+                <a:ea typeface="楷体"/>
+                <a:cs typeface="楷体"/>
               </a:rPr>
-              <a:t>Step 5 立场</a:t>
-            </a:r>
-          </a:p>
-        </p:txBody>
-      </p:sp>
-      <p:sp>
-        <p:nvSpPr>
-          <p:cNvPr id="25" name="Rounded Rectangle 24"/>
-          <p:cNvSpPr/>
-          <p:nvPr/>
-        </p:nvSpPr>
-        <p:spPr>
-          <a:xfrm>
-            <a:off x="640080" y="5486400"/>
-            <a:ext cx="10911535" cy="685800"/>
-          </a:xfrm>
-          <a:prstGeom prst="roundRect">
-            <a:avLst/>
-          </a:prstGeom>
-          <a:solidFill>
-            <a:srgbClr val="FFFFFF"/>
-          </a:solidFill>
-          <a:ln w="22860">
-            <a:solidFill>
-              <a:srgbClr val="2E7D6B"/>
-            </a:solidFill>
-          </a:ln>
-          <a:effectLst/>
-        </p:spPr>
-        <p:style>
-          <a:lnRef idx="1">
-            <a:schemeClr val="accent1"/>
-          </a:lnRef>
-          <a:fillRef idx="3">
-            <a:schemeClr val="accent1"/>
-          </a:fillRef>
-          <a:effectRef idx="2">
-            <a:schemeClr val="accent1"/>
-          </a:effectRef>
-          <a:fontRef idx="minor">
-            <a:schemeClr val="lt1"/>
-          </a:fontRef>
-        </p:style>
-        <p:txBody>
-          <a:bodyPr rtlCol="0" anchor="ctr"/>
-          <a:lstStyle/>
-          <a:p>
-            <a:pPr algn="ctr"/>
-          </a:p>
-        </p:txBody>
-      </p:sp>
-      <p:sp>
-        <p:nvSpPr>
-          <p:cNvPr id="26" name="Oval 25"/>
-          <p:cNvSpPr/>
-          <p:nvPr/>
-        </p:nvSpPr>
-        <p:spPr>
-          <a:xfrm>
-            <a:off x="804672" y="5650992"/>
-            <a:ext cx="457200" cy="457200"/>
-          </a:xfrm>
-          <a:prstGeom prst="ellipse">
-            <a:avLst/>
-          </a:prstGeom>
-          <a:solidFill>
-            <a:srgbClr val="2E7D6B"/>
-          </a:solidFill>
-          <a:ln>
-            <a:noFill/>
-          </a:ln>
-          <a:effectLst/>
-        </p:spPr>
-        <p:style>
-          <a:lnRef idx="1">
-            <a:schemeClr val="accent1"/>
-          </a:lnRef>
-          <a:fillRef idx="3">
-            <a:schemeClr val="accent1"/>
-          </a:fillRef>
-          <a:effectRef idx="2">
-            <a:schemeClr val="accent1"/>
-          </a:effectRef>
-          <a:fontRef idx="minor">
-            <a:schemeClr val="lt1"/>
-          </a:fontRef>
-        </p:style>
-        <p:txBody>
-          <a:bodyPr rtlCol="0" anchor="ctr"/>
-          <a:lstStyle/>
-          <a:p>
-            <a:pPr algn="ctr"/>
-          </a:p>
-        </p:txBody>
-      </p:sp>
-      <p:sp>
-        <p:nvSpPr>
-          <p:cNvPr id="27" name="TextBox 26"/>
-          <p:cNvSpPr txBox="1"/>
-          <p:nvPr/>
-        </p:nvSpPr>
-        <p:spPr>
-          <a:xfrm>
-            <a:off x="804672" y="5705856"/>
-            <a:ext cx="457200" cy="384048"/>
-          </a:xfrm>
-          <a:prstGeom prst="rect">
-            <a:avLst/>
-          </a:prstGeom>
-          <a:noFill/>
-        </p:spPr>
-        <p:txBody>
-          <a:bodyPr wrap="square" anchor="t" lIns="0" rIns="0" tIns="0" bIns="0">
-            <a:spAutoFit/>
-          </a:bodyPr>
-          <a:lstStyle/>
-          <a:p>
-            <a:pPr algn="ctr"/>
-            <a:r>
-              <a:rPr sz="1600" b="1">
-                <a:solidFill>
-                  <a:srgbClr val="FFFFFF"/>
-                </a:solidFill>
-                <a:latin typeface="微软雅黑"/>
-                <a:ea typeface="微软雅黑"/>
-                <a:cs typeface="微软雅黑"/>
-              </a:rPr>
-              <a:t>6</a:t>
-            </a:r>
-          </a:p>
-        </p:txBody>
-      </p:sp>
-      <p:sp>
-        <p:nvSpPr>
-          <p:cNvPr id="28" name="TextBox 27"/>
-          <p:cNvSpPr txBox="1"/>
-          <p:nvPr/>
-        </p:nvSpPr>
-        <p:spPr>
-          <a:xfrm>
-            <a:off x="1371600" y="5596128"/>
-            <a:ext cx="9997135" cy="484632"/>
-          </a:xfrm>
-          <a:prstGeom prst="rect">
-            <a:avLst/>
-          </a:prstGeom>
-          <a:noFill/>
-        </p:spPr>
-        <p:txBody>
-          <a:bodyPr wrap="square" anchor="t" lIns="0" rIns="0" tIns="0" bIns="0">
-            <a:spAutoFit/>
-          </a:bodyPr>
-          <a:lstStyle/>
-          <a:p>
-            <a:pPr algn="l">
-              <a:lnSpc>
-                <a:spcPct val="110000"/>
-              </a:lnSpc>
-            </a:pPr>
-            <a:r>
-              <a:rPr sz="1600" b="1">
-                <a:solidFill>
-                  <a:srgbClr val="1C2A33"/>
-                </a:solidFill>
-                <a:latin typeface="微软雅黑"/>
-                <a:ea typeface="微软雅黑"/>
-                <a:cs typeface="微软雅黑"/>
-              </a:rPr>
-              <a:t>Step 6 小结+作业</a:t>
-            </a:r>
-          </a:p>
-        </p:txBody>
-      </p:sp>
-      <p:sp>
-        <p:nvSpPr>
-          <p:cNvPr id="29" name="TextBox 28"/>
+              <a:t>对比法（与十思）。</a:t>
+            </a:r>
+          </a:p>
+        </p:txBody>
+      </p:sp>
+      <p:sp>
+        <p:nvSpPr>
+          <p:cNvPr id="26" name="TextBox 25"/>
           <p:cNvSpPr txBox="1"/>
           <p:nvPr/>
         </p:nvSpPr>
@@ -6589,7 +6743,7 @@
                 <a:ea typeface="微软雅黑"/>
                 <a:cs typeface="微软雅黑"/>
               </a:rPr>
-              <a:t>易混易错</a:t>
+              <a:t>难点</a:t>
             </a:r>
           </a:p>
         </p:txBody>
@@ -6640,14 +6794,51 @@
       </p:sp>
       <p:sp>
         <p:nvSpPr>
-          <p:cNvPr id="5" name="Rounded Rectangle 4"/>
+          <p:cNvPr id="5" name="TextBox 4"/>
+          <p:cNvSpPr txBox="1"/>
+          <p:nvPr/>
+        </p:nvSpPr>
+        <p:spPr>
+          <a:xfrm>
+            <a:off x="640080" y="1325880"/>
+            <a:ext cx="10911535" cy="548640"/>
+          </a:xfrm>
+          <a:prstGeom prst="rect">
+            <a:avLst/>
+          </a:prstGeom>
+          <a:noFill/>
+        </p:spPr>
+        <p:txBody>
+          <a:bodyPr wrap="square" anchor="t" lIns="0" rIns="0" tIns="0" bIns="0">
+            <a:spAutoFit/>
+          </a:bodyPr>
+          <a:lstStyle/>
+          <a:p>
+            <a:pPr algn="l"/>
+            <a:r>
+              <a:rPr sz="2600" b="1">
+                <a:solidFill>
+                  <a:srgbClr val="1C2A33"/>
+                </a:solidFill>
+                <a:latin typeface="楷体"/>
+                <a:ea typeface="楷体"/>
+                <a:cs typeface="楷体"/>
+              </a:rPr>
+              <a:t>学习难点与突破</a:t>
+            </a:r>
+          </a:p>
+        </p:txBody>
+      </p:sp>
+      <p:sp>
+        <p:nvSpPr>
+          <p:cNvPr id="6" name="Rounded Rectangle 5"/>
           <p:cNvSpPr/>
           <p:nvPr/>
         </p:nvSpPr>
         <p:spPr>
           <a:xfrm>
-            <a:off x="640080" y="1417320"/>
-            <a:ext cx="5349240" cy="2057400"/>
+            <a:off x="640080" y="2194560"/>
+            <a:ext cx="3393338" cy="3931920"/>
           </a:xfrm>
           <a:prstGeom prst="roundRect">
             <a:avLst/>
@@ -6686,14 +6877,14 @@
       </p:sp>
       <p:sp>
         <p:nvSpPr>
-          <p:cNvPr id="6" name="Oval 5"/>
+          <p:cNvPr id="7" name="Oval 6"/>
           <p:cNvSpPr/>
           <p:nvPr/>
         </p:nvSpPr>
         <p:spPr>
           <a:xfrm>
-            <a:off x="804672" y="1581912"/>
-            <a:ext cx="457200" cy="457200"/>
+            <a:off x="868680" y="2423160"/>
+            <a:ext cx="502920" cy="502920"/>
           </a:xfrm>
           <a:prstGeom prst="ellipse">
             <a:avLst/>
@@ -6730,14 +6921,14 @@
       </p:sp>
       <p:sp>
         <p:nvSpPr>
-          <p:cNvPr id="7" name="TextBox 6"/>
+          <p:cNvPr id="8" name="TextBox 7"/>
           <p:cNvSpPr txBox="1"/>
           <p:nvPr/>
         </p:nvSpPr>
         <p:spPr>
           <a:xfrm>
-            <a:off x="804672" y="1636776"/>
-            <a:ext cx="457200" cy="384048"/>
+            <a:off x="868680" y="2487168"/>
+            <a:ext cx="502920" cy="384048"/>
           </a:xfrm>
           <a:prstGeom prst="rect">
             <a:avLst/>
@@ -6752,7 +6943,7 @@
           <a:p>
             <a:pPr algn="ctr"/>
             <a:r>
-              <a:rPr sz="1600" b="1">
+              <a:rPr sz="1800" b="1">
                 <a:solidFill>
                   <a:srgbClr val="FFFFFF"/>
                 </a:solidFill>
@@ -6760,21 +6951,21 @@
                 <a:ea typeface="微软雅黑"/>
                 <a:cs typeface="微软雅黑"/>
               </a:rPr>
-              <a:t>!</a:t>
-            </a:r>
-          </a:p>
-        </p:txBody>
-      </p:sp>
-      <p:sp>
-        <p:nvSpPr>
-          <p:cNvPr id="8" name="TextBox 7"/>
+              <a:t>1</a:t>
+            </a:r>
+          </a:p>
+        </p:txBody>
+      </p:sp>
+      <p:sp>
+        <p:nvSpPr>
+          <p:cNvPr id="9" name="TextBox 8"/>
           <p:cNvSpPr txBox="1"/>
           <p:nvPr/>
         </p:nvSpPr>
         <p:spPr>
           <a:xfrm>
-            <a:off x="1371600" y="1527048"/>
-            <a:ext cx="4434840" cy="457200"/>
+            <a:off x="1508760" y="2450592"/>
+            <a:ext cx="2341778" cy="548640"/>
           </a:xfrm>
           <a:prstGeom prst="rect">
             <a:avLst/>
@@ -6789,52 +6980,11 @@
           <a:p>
             <a:pPr algn="l">
               <a:lnSpc>
-                <a:spcPct val="110000"/>
+                <a:spcPct val="130000"/>
               </a:lnSpc>
             </a:pPr>
             <a:r>
-              <a:rPr sz="1600" b="1">
-                <a:solidFill>
-                  <a:srgbClr val="1C2A33"/>
-                </a:solidFill>
-                <a:latin typeface="微软雅黑"/>
-                <a:ea typeface="微软雅黑"/>
-                <a:cs typeface="微软雅黑"/>
-              </a:rPr>
-              <a:t/>
-            </a:r>
-          </a:p>
-        </p:txBody>
-      </p:sp>
-      <p:sp>
-        <p:nvSpPr>
-          <p:cNvPr id="9" name="TextBox 8"/>
-          <p:cNvSpPr txBox="1"/>
-          <p:nvPr/>
-        </p:nvSpPr>
-        <p:spPr>
-          <a:xfrm>
-            <a:off x="1371600" y="1965960"/>
-            <a:ext cx="4434840" cy="1417320"/>
-          </a:xfrm>
-          <a:prstGeom prst="rect">
-            <a:avLst/>
-          </a:prstGeom>
-          <a:noFill/>
-        </p:spPr>
-        <p:txBody>
-          <a:bodyPr wrap="square" anchor="t" lIns="0" rIns="0" tIns="0" bIns="0">
-            <a:spAutoFit/>
-          </a:bodyPr>
-          <a:lstStyle/>
-          <a:p>
-            <a:pPr algn="l">
-              <a:lnSpc>
-                <a:spcPct val="128000"/>
-              </a:lnSpc>
-            </a:pPr>
-            <a:r>
-              <a:rPr sz="1400" b="0">
+              <a:rPr sz="1650" b="1">
                 <a:solidFill>
                   <a:srgbClr val="1C2A33"/>
                 </a:solidFill>
@@ -6842,21 +6992,62 @@
                 <a:ea typeface="楷体"/>
                 <a:cs typeface="楷体"/>
               </a:rPr>
-              <a:t>① 原则用。原因：易略，需点「标尺」。</a:t>
-            </a:r>
-          </a:p>
-        </p:txBody>
-      </p:sp>
-      <p:sp>
-        <p:nvSpPr>
-          <p:cNvPr id="10" name="Rounded Rectangle 9"/>
+              <a:t>原则用</a:t>
+            </a:r>
+          </a:p>
+        </p:txBody>
+      </p:sp>
+      <p:sp>
+        <p:nvSpPr>
+          <p:cNvPr id="10" name="TextBox 9"/>
+          <p:cNvSpPr txBox="1"/>
+          <p:nvPr/>
+        </p:nvSpPr>
+        <p:spPr>
+          <a:xfrm>
+            <a:off x="914400" y="3200400"/>
+            <a:ext cx="2844698" cy="2788920"/>
+          </a:xfrm>
+          <a:prstGeom prst="rect">
+            <a:avLst/>
+          </a:prstGeom>
+          <a:noFill/>
+        </p:spPr>
+        <p:txBody>
+          <a:bodyPr wrap="square" anchor="t" lIns="0" rIns="0" tIns="0" bIns="0">
+            <a:spAutoFit/>
+          </a:bodyPr>
+          <a:lstStyle/>
+          <a:p>
+            <a:pPr algn="l">
+              <a:lnSpc>
+                <a:spcPct val="150000"/>
+              </a:lnSpc>
+            </a:pPr>
+            <a:r>
+              <a:rPr sz="1350" b="0">
+                <a:solidFill>
+                  <a:srgbClr val="1C2A33"/>
+                </a:solidFill>
+                <a:latin typeface="楷体"/>
+                <a:ea typeface="楷体"/>
+                <a:cs typeface="楷体"/>
+              </a:rPr>
+              <a:t>突破：易略，需点「标尺」。</a:t>
+            </a:r>
+          </a:p>
+        </p:txBody>
+      </p:sp>
+      <p:sp>
+        <p:nvSpPr>
+          <p:cNvPr id="11" name="Rounded Rectangle 10"/>
           <p:cNvSpPr/>
           <p:nvPr/>
         </p:nvSpPr>
         <p:spPr>
           <a:xfrm>
-            <a:off x="6263640" y="1417320"/>
-            <a:ext cx="5349240" cy="2057400"/>
+            <a:off x="4399178" y="2194560"/>
+            <a:ext cx="3393338" cy="3931920"/>
           </a:xfrm>
           <a:prstGeom prst="roundRect">
             <a:avLst/>
@@ -6866,7 +7057,7 @@
           </a:solidFill>
           <a:ln w="22860">
             <a:solidFill>
-              <a:srgbClr val="B23A2A"/>
+              <a:srgbClr val="2E7D6B"/>
             </a:solidFill>
           </a:ln>
           <a:effectLst/>
@@ -6895,20 +7086,20 @@
       </p:sp>
       <p:sp>
         <p:nvSpPr>
-          <p:cNvPr id="11" name="Oval 10"/>
+          <p:cNvPr id="12" name="Oval 11"/>
           <p:cNvSpPr/>
           <p:nvPr/>
         </p:nvSpPr>
         <p:spPr>
           <a:xfrm>
-            <a:off x="6428232" y="1581912"/>
-            <a:ext cx="457200" cy="457200"/>
+            <a:off x="4627778" y="2423160"/>
+            <a:ext cx="502920" cy="502920"/>
           </a:xfrm>
           <a:prstGeom prst="ellipse">
             <a:avLst/>
           </a:prstGeom>
           <a:solidFill>
-            <a:srgbClr val="B23A2A"/>
+            <a:srgbClr val="2E7D6B"/>
           </a:solidFill>
           <a:ln>
             <a:noFill/>
@@ -6939,14 +7130,14 @@
       </p:sp>
       <p:sp>
         <p:nvSpPr>
-          <p:cNvPr id="12" name="TextBox 11"/>
+          <p:cNvPr id="13" name="TextBox 12"/>
           <p:cNvSpPr txBox="1"/>
           <p:nvPr/>
         </p:nvSpPr>
         <p:spPr>
           <a:xfrm>
-            <a:off x="6428232" y="1636776"/>
-            <a:ext cx="457200" cy="384048"/>
+            <a:off x="4627778" y="2487168"/>
+            <a:ext cx="502920" cy="384048"/>
           </a:xfrm>
           <a:prstGeom prst="rect">
             <a:avLst/>
@@ -6961,7 +7152,7 @@
           <a:p>
             <a:pPr algn="ctr"/>
             <a:r>
-              <a:rPr sz="1600" b="1">
+              <a:rPr sz="1800" b="1">
                 <a:solidFill>
                   <a:srgbClr val="FFFFFF"/>
                 </a:solidFill>
@@ -6969,21 +7160,21 @@
                 <a:ea typeface="微软雅黑"/>
                 <a:cs typeface="微软雅黑"/>
               </a:rPr>
-              <a:t>!</a:t>
-            </a:r>
-          </a:p>
-        </p:txBody>
-      </p:sp>
-      <p:sp>
-        <p:nvSpPr>
-          <p:cNvPr id="13" name="TextBox 12"/>
+              <a:t>2</a:t>
+            </a:r>
+          </a:p>
+        </p:txBody>
+      </p:sp>
+      <p:sp>
+        <p:nvSpPr>
+          <p:cNvPr id="14" name="TextBox 13"/>
           <p:cNvSpPr txBox="1"/>
           <p:nvPr/>
         </p:nvSpPr>
         <p:spPr>
           <a:xfrm>
-            <a:off x="6995160" y="1527048"/>
-            <a:ext cx="4434840" cy="457200"/>
+            <a:off x="5267858" y="2450592"/>
+            <a:ext cx="2341778" cy="548640"/>
           </a:xfrm>
           <a:prstGeom prst="rect">
             <a:avLst/>
@@ -6998,52 +7189,11 @@
           <a:p>
             <a:pPr algn="l">
               <a:lnSpc>
-                <a:spcPct val="110000"/>
+                <a:spcPct val="130000"/>
               </a:lnSpc>
             </a:pPr>
             <a:r>
-              <a:rPr sz="1600" b="1">
-                <a:solidFill>
-                  <a:srgbClr val="1C2A33"/>
-                </a:solidFill>
-                <a:latin typeface="微软雅黑"/>
-                <a:ea typeface="微软雅黑"/>
-                <a:cs typeface="微软雅黑"/>
-              </a:rPr>
-              <a:t/>
-            </a:r>
-          </a:p>
-        </p:txBody>
-      </p:sp>
-      <p:sp>
-        <p:nvSpPr>
-          <p:cNvPr id="14" name="TextBox 13"/>
-          <p:cNvSpPr txBox="1"/>
-          <p:nvPr/>
-        </p:nvSpPr>
-        <p:spPr>
-          <a:xfrm>
-            <a:off x="6995160" y="1965960"/>
-            <a:ext cx="4434840" cy="1417320"/>
-          </a:xfrm>
-          <a:prstGeom prst="rect">
-            <a:avLst/>
-          </a:prstGeom>
-          <a:noFill/>
-        </p:spPr>
-        <p:txBody>
-          <a:bodyPr wrap="square" anchor="t" lIns="0" rIns="0" tIns="0" bIns="0">
-            <a:spAutoFit/>
-          </a:bodyPr>
-          <a:lstStyle/>
-          <a:p>
-            <a:pPr algn="l">
-              <a:lnSpc>
-                <a:spcPct val="128000"/>
-              </a:lnSpc>
-            </a:pPr>
-            <a:r>
-              <a:rPr sz="1400" b="0">
+              <a:rPr sz="1650" b="1">
                 <a:solidFill>
                   <a:srgbClr val="1C2A33"/>
                 </a:solidFill>
@@ -7051,21 +7201,62 @@
                 <a:ea typeface="楷体"/>
                 <a:cs typeface="楷体"/>
               </a:rPr>
-              <a:t>② 驳结构。原因：易乱，需序。</a:t>
-            </a:r>
-          </a:p>
-        </p:txBody>
-      </p:sp>
-      <p:sp>
-        <p:nvSpPr>
-          <p:cNvPr id="15" name="Rounded Rectangle 14"/>
+              <a:t>驳结构</a:t>
+            </a:r>
+          </a:p>
+        </p:txBody>
+      </p:sp>
+      <p:sp>
+        <p:nvSpPr>
+          <p:cNvPr id="15" name="TextBox 14"/>
+          <p:cNvSpPr txBox="1"/>
+          <p:nvPr/>
+        </p:nvSpPr>
+        <p:spPr>
+          <a:xfrm>
+            <a:off x="4673498" y="3200400"/>
+            <a:ext cx="2844698" cy="2788920"/>
+          </a:xfrm>
+          <a:prstGeom prst="rect">
+            <a:avLst/>
+          </a:prstGeom>
+          <a:noFill/>
+        </p:spPr>
+        <p:txBody>
+          <a:bodyPr wrap="square" anchor="t" lIns="0" rIns="0" tIns="0" bIns="0">
+            <a:spAutoFit/>
+          </a:bodyPr>
+          <a:lstStyle/>
+          <a:p>
+            <a:pPr algn="l">
+              <a:lnSpc>
+                <a:spcPct val="150000"/>
+              </a:lnSpc>
+            </a:pPr>
+            <a:r>
+              <a:rPr sz="1350" b="0">
+                <a:solidFill>
+                  <a:srgbClr val="1C2A33"/>
+                </a:solidFill>
+                <a:latin typeface="楷体"/>
+                <a:ea typeface="楷体"/>
+                <a:cs typeface="楷体"/>
+              </a:rPr>
+              <a:t>突破：易乱，需序。</a:t>
+            </a:r>
+          </a:p>
+        </p:txBody>
+      </p:sp>
+      <p:sp>
+        <p:nvSpPr>
+          <p:cNvPr id="16" name="Rounded Rectangle 15"/>
           <p:cNvSpPr/>
           <p:nvPr/>
         </p:nvSpPr>
         <p:spPr>
           <a:xfrm>
-            <a:off x="640080" y="3703320"/>
-            <a:ext cx="5349240" cy="2057400"/>
+            <a:off x="8158276" y="2194560"/>
+            <a:ext cx="3393338" cy="3931920"/>
           </a:xfrm>
           <a:prstGeom prst="roundRect">
             <a:avLst/>
@@ -7075,7 +7266,7 @@
           </a:solidFill>
           <a:ln w="22860">
             <a:solidFill>
-              <a:srgbClr val="B23A2A"/>
+              <a:srgbClr val="C8A86B"/>
             </a:solidFill>
           </a:ln>
           <a:effectLst/>
@@ -7104,20 +7295,20 @@
       </p:sp>
       <p:sp>
         <p:nvSpPr>
-          <p:cNvPr id="16" name="Oval 15"/>
+          <p:cNvPr id="17" name="Oval 16"/>
           <p:cNvSpPr/>
           <p:nvPr/>
         </p:nvSpPr>
         <p:spPr>
           <a:xfrm>
-            <a:off x="804672" y="3867912"/>
-            <a:ext cx="457200" cy="457200"/>
+            <a:off x="8386876" y="2423160"/>
+            <a:ext cx="502920" cy="502920"/>
           </a:xfrm>
           <a:prstGeom prst="ellipse">
             <a:avLst/>
           </a:prstGeom>
           <a:solidFill>
-            <a:srgbClr val="B23A2A"/>
+            <a:srgbClr val="C8A86B"/>
           </a:solidFill>
           <a:ln>
             <a:noFill/>
@@ -7148,14 +7339,14 @@
       </p:sp>
       <p:sp>
         <p:nvSpPr>
-          <p:cNvPr id="17" name="TextBox 16"/>
+          <p:cNvPr id="18" name="TextBox 17"/>
           <p:cNvSpPr txBox="1"/>
           <p:nvPr/>
         </p:nvSpPr>
         <p:spPr>
           <a:xfrm>
-            <a:off x="804672" y="3922776"/>
-            <a:ext cx="457200" cy="384048"/>
+            <a:off x="8386876" y="2487168"/>
+            <a:ext cx="502920" cy="384048"/>
           </a:xfrm>
           <a:prstGeom prst="rect">
             <a:avLst/>
@@ -7170,7 +7361,7 @@
           <a:p>
             <a:pPr algn="ctr"/>
             <a:r>
-              <a:rPr sz="1600" b="1">
+              <a:rPr sz="1800" b="1">
                 <a:solidFill>
                   <a:srgbClr val="FFFFFF"/>
                 </a:solidFill>
@@ -7178,21 +7369,21 @@
                 <a:ea typeface="微软雅黑"/>
                 <a:cs typeface="微软雅黑"/>
               </a:rPr>
-              <a:t>!</a:t>
-            </a:r>
-          </a:p>
-        </p:txBody>
-      </p:sp>
-      <p:sp>
-        <p:nvSpPr>
-          <p:cNvPr id="18" name="TextBox 17"/>
+              <a:t>3</a:t>
+            </a:r>
+          </a:p>
+        </p:txBody>
+      </p:sp>
+      <p:sp>
+        <p:nvSpPr>
+          <p:cNvPr id="19" name="TextBox 18"/>
           <p:cNvSpPr txBox="1"/>
           <p:nvPr/>
         </p:nvSpPr>
         <p:spPr>
           <a:xfrm>
-            <a:off x="1371600" y="3813048"/>
-            <a:ext cx="4434840" cy="457200"/>
+            <a:off x="9026956" y="2450592"/>
+            <a:ext cx="2341778" cy="548640"/>
           </a:xfrm>
           <a:prstGeom prst="rect">
             <a:avLst/>
@@ -7207,52 +7398,11 @@
           <a:p>
             <a:pPr algn="l">
               <a:lnSpc>
-                <a:spcPct val="110000"/>
+                <a:spcPct val="130000"/>
               </a:lnSpc>
             </a:pPr>
             <a:r>
-              <a:rPr sz="1600" b="1">
-                <a:solidFill>
-                  <a:srgbClr val="1C2A33"/>
-                </a:solidFill>
-                <a:latin typeface="微软雅黑"/>
-                <a:ea typeface="微软雅黑"/>
-                <a:cs typeface="微软雅黑"/>
-              </a:rPr>
-              <a:t/>
-            </a:r>
-          </a:p>
-        </p:txBody>
-      </p:sp>
-      <p:sp>
-        <p:nvSpPr>
-          <p:cNvPr id="19" name="TextBox 18"/>
-          <p:cNvSpPr txBox="1"/>
-          <p:nvPr/>
-        </p:nvSpPr>
-        <p:spPr>
-          <a:xfrm>
-            <a:off x="1371600" y="4251960"/>
-            <a:ext cx="4434840" cy="1417320"/>
-          </a:xfrm>
-          <a:prstGeom prst="rect">
-            <a:avLst/>
-          </a:prstGeom>
-          <a:noFill/>
-        </p:spPr>
-        <p:txBody>
-          <a:bodyPr wrap="square" anchor="t" lIns="0" rIns="0" tIns="0" bIns="0">
-            <a:spAutoFit/>
-          </a:bodyPr>
-          <a:lstStyle/>
-          <a:p>
-            <a:pPr algn="l">
-              <a:lnSpc>
-                <a:spcPct val="128000"/>
-              </a:lnSpc>
-            </a:pPr>
-            <a:r>
-              <a:rPr sz="1400" b="0">
+              <a:rPr sz="1650" b="1">
                 <a:solidFill>
                   <a:srgbClr val="1C2A33"/>
                 </a:solidFill>
@@ -7260,7 +7410,7 @@
                 <a:ea typeface="楷体"/>
                 <a:cs typeface="楷体"/>
               </a:rPr>
-              <a:t>③ 立场。原因：易当意气，需升改革。</a:t>
+              <a:t>立场</a:t>
             </a:r>
           </a:p>
         </p:txBody>
@@ -7268,6 +7418,47 @@
       <p:sp>
         <p:nvSpPr>
           <p:cNvPr id="20" name="TextBox 19"/>
+          <p:cNvSpPr txBox="1"/>
+          <p:nvPr/>
+        </p:nvSpPr>
+        <p:spPr>
+          <a:xfrm>
+            <a:off x="8432596" y="3200400"/>
+            <a:ext cx="2844698" cy="2788920"/>
+          </a:xfrm>
+          <a:prstGeom prst="rect">
+            <a:avLst/>
+          </a:prstGeom>
+          <a:noFill/>
+        </p:spPr>
+        <p:txBody>
+          <a:bodyPr wrap="square" anchor="t" lIns="0" rIns="0" tIns="0" bIns="0">
+            <a:spAutoFit/>
+          </a:bodyPr>
+          <a:lstStyle/>
+          <a:p>
+            <a:pPr algn="l">
+              <a:lnSpc>
+                <a:spcPct val="150000"/>
+              </a:lnSpc>
+            </a:pPr>
+            <a:r>
+              <a:rPr sz="1350" b="0">
+                <a:solidFill>
+                  <a:srgbClr val="1C2A33"/>
+                </a:solidFill>
+                <a:latin typeface="楷体"/>
+                <a:ea typeface="楷体"/>
+                <a:cs typeface="楷体"/>
+              </a:rPr>
+              <a:t>突破：易当意气，需升改革。</a:t>
+            </a:r>
+          </a:p>
+        </p:txBody>
+      </p:sp>
+      <p:sp>
+        <p:nvSpPr>
+          <p:cNvPr id="21" name="TextBox 20"/>
           <p:cNvSpPr txBox="1"/>
           <p:nvPr/>
         </p:nvSpPr>
@@ -7335,7 +7526,7 @@
             <a:avLst/>
           </a:prstGeom>
           <a:solidFill>
-            <a:srgbClr val="F4EFE6"/>
+            <a:srgbClr val="1C2A33"/>
           </a:solidFill>
           <a:ln>
             <a:noFill/>
@@ -7400,7 +7591,7 @@
                 <a:ea typeface="微软雅黑"/>
                 <a:cs typeface="微软雅黑"/>
               </a:rPr>
-              <a:t>要点板书</a:t>
+              <a:t>板书精华</a:t>
             </a:r>
           </a:p>
         </p:txBody>
@@ -7451,60 +7642,14 @@
       </p:sp>
       <p:sp>
         <p:nvSpPr>
-          <p:cNvPr id="5" name="Rounded Rectangle 4"/>
-          <p:cNvSpPr/>
-          <p:nvPr/>
-        </p:nvSpPr>
-        <p:spPr>
-          <a:xfrm>
-            <a:off x="640080" y="1417320"/>
-            <a:ext cx="10911535" cy="5394960"/>
-          </a:xfrm>
-          <a:prstGeom prst="roundRect">
-            <a:avLst/>
-          </a:prstGeom>
-          <a:solidFill>
-            <a:srgbClr val="FFFFFF"/>
-          </a:solidFill>
-          <a:ln w="25400">
-            <a:solidFill>
-              <a:srgbClr val="C8A86B"/>
-            </a:solidFill>
-          </a:ln>
-          <a:effectLst/>
-        </p:spPr>
-        <p:style>
-          <a:lnRef idx="1">
-            <a:schemeClr val="accent1"/>
-          </a:lnRef>
-          <a:fillRef idx="3">
-            <a:schemeClr val="accent1"/>
-          </a:fillRef>
-          <a:effectRef idx="2">
-            <a:schemeClr val="accent1"/>
-          </a:effectRef>
-          <a:fontRef idx="minor">
-            <a:schemeClr val="lt1"/>
-          </a:fontRef>
-        </p:style>
-        <p:txBody>
-          <a:bodyPr rtlCol="0" anchor="ctr"/>
-          <a:lstStyle/>
-          <a:p>
-            <a:pPr algn="ctr"/>
-          </a:p>
-        </p:txBody>
-      </p:sp>
-      <p:sp>
-        <p:nvSpPr>
-          <p:cNvPr id="6" name="TextBox 5"/>
+          <p:cNvPr id="5" name="TextBox 4"/>
           <p:cNvSpPr txBox="1"/>
           <p:nvPr/>
         </p:nvSpPr>
         <p:spPr>
           <a:xfrm>
-            <a:off x="914400" y="1554480"/>
-            <a:ext cx="10362895" cy="5120640"/>
+            <a:off x="640080" y="1325880"/>
+            <a:ext cx="10911535" cy="548640"/>
           </a:xfrm>
           <a:prstGeom prst="rect">
             <a:avLst/>
@@ -7517,50 +7662,31 @@
           </a:bodyPr>
           <a:lstStyle/>
           <a:p>
-            <a:pPr algn="l">
-              <a:lnSpc>
-                <a:spcPct val="110000"/>
-              </a:lnSpc>
-              <a:spcAft>
-                <a:spcPts val="100"/>
-              </a:spcAft>
-            </a:pPr>
-            <a:r>
-              <a:rPr sz="1300" b="0">
-                <a:solidFill>
-                  <a:srgbClr val="1C2A33"/>
-                </a:solidFill>
-                <a:latin typeface="微软雅黑"/>
-                <a:ea typeface="微软雅黑"/>
-                <a:cs typeface="微软雅黑"/>
+            <a:pPr algn="l"/>
+            <a:r>
+              <a:rPr sz="2800" b="1">
+                <a:solidFill>
+                  <a:srgbClr val="C8A86B"/>
+                </a:solidFill>
+                <a:latin typeface="楷体"/>
+                <a:ea typeface="楷体"/>
+                <a:cs typeface="楷体"/>
               </a:rPr>
-              <a:t>┌── 答司马·王 ──┐
-│ 驳五罪 │
-│ │
-│ 原则:名实相符 │
-│ (标尺) │
-│ │
-│ 驳五罪: │
-│ 侵官/生事/征利 │
-│ 拒谏/致怨 │
-│ 逐条破(用尺量) │
-│ │
-│ 立场:为天下 │
-└────────────────┘</a:t>
-            </a:r>
-          </a:p>
-        </p:txBody>
-      </p:sp>
-      <p:sp>
-        <p:nvSpPr>
-          <p:cNvPr id="7" name="TextBox 6"/>
+              <a:t>板书精华</a:t>
+            </a:r>
+          </a:p>
+        </p:txBody>
+      </p:sp>
+      <p:sp>
+        <p:nvSpPr>
+          <p:cNvPr id="6" name="TextBox 5"/>
           <p:cNvSpPr txBox="1"/>
           <p:nvPr/>
         </p:nvSpPr>
         <p:spPr>
           <a:xfrm>
-            <a:off x="11002975" y="6355080"/>
-            <a:ext cx="731520" cy="320040"/>
+            <a:off x="640080" y="2103120"/>
+            <a:ext cx="5181447" cy="475488"/>
           </a:xfrm>
           <a:prstGeom prst="rect">
             <a:avLst/>
@@ -7573,11 +7699,380 @@
           </a:bodyPr>
           <a:lstStyle/>
           <a:p>
+            <a:pPr algn="l">
+              <a:lnSpc>
+                <a:spcPct val="125000"/>
+              </a:lnSpc>
+            </a:pPr>
+            <a:r>
+              <a:rPr sz="1250" b="0">
+                <a:solidFill>
+                  <a:srgbClr val="E7DFD2"/>
+                </a:solidFill>
+                <a:latin typeface="楷体"/>
+                <a:ea typeface="楷体"/>
+                <a:cs typeface="楷体"/>
+              </a:rPr>
+              <a:t>· 答司马·王</a:t>
+            </a:r>
+          </a:p>
+        </p:txBody>
+      </p:sp>
+      <p:sp>
+        <p:nvSpPr>
+          <p:cNvPr id="7" name="TextBox 6"/>
+          <p:cNvSpPr txBox="1"/>
+          <p:nvPr/>
+        </p:nvSpPr>
+        <p:spPr>
+          <a:xfrm>
+            <a:off x="640080" y="2578608"/>
+            <a:ext cx="5181447" cy="475488"/>
+          </a:xfrm>
+          <a:prstGeom prst="rect">
+            <a:avLst/>
+          </a:prstGeom>
+          <a:noFill/>
+        </p:spPr>
+        <p:txBody>
+          <a:bodyPr wrap="square" anchor="t" lIns="0" rIns="0" tIns="0" bIns="0">
+            <a:spAutoFit/>
+          </a:bodyPr>
+          <a:lstStyle/>
+          <a:p>
+            <a:pPr algn="l">
+              <a:lnSpc>
+                <a:spcPct val="125000"/>
+              </a:lnSpc>
+            </a:pPr>
+            <a:r>
+              <a:rPr sz="1250" b="0">
+                <a:solidFill>
+                  <a:srgbClr val="E7DFD2"/>
+                </a:solidFill>
+                <a:latin typeface="楷体"/>
+                <a:ea typeface="楷体"/>
+                <a:cs typeface="楷体"/>
+              </a:rPr>
+              <a:t>· 驳五罪</a:t>
+            </a:r>
+          </a:p>
+        </p:txBody>
+      </p:sp>
+      <p:sp>
+        <p:nvSpPr>
+          <p:cNvPr id="8" name="TextBox 7"/>
+          <p:cNvSpPr txBox="1"/>
+          <p:nvPr/>
+        </p:nvSpPr>
+        <p:spPr>
+          <a:xfrm>
+            <a:off x="640080" y="3054096"/>
+            <a:ext cx="5181447" cy="475488"/>
+          </a:xfrm>
+          <a:prstGeom prst="rect">
+            <a:avLst/>
+          </a:prstGeom>
+          <a:noFill/>
+        </p:spPr>
+        <p:txBody>
+          <a:bodyPr wrap="square" anchor="t" lIns="0" rIns="0" tIns="0" bIns="0">
+            <a:spAutoFit/>
+          </a:bodyPr>
+          <a:lstStyle/>
+          <a:p>
+            <a:pPr algn="l">
+              <a:lnSpc>
+                <a:spcPct val="125000"/>
+              </a:lnSpc>
+            </a:pPr>
+            <a:r>
+              <a:rPr sz="1250" b="0">
+                <a:solidFill>
+                  <a:srgbClr val="E7DFD2"/>
+                </a:solidFill>
+                <a:latin typeface="楷体"/>
+                <a:ea typeface="楷体"/>
+                <a:cs typeface="楷体"/>
+              </a:rPr>
+              <a:t>· 原则:名实相符</a:t>
+            </a:r>
+          </a:p>
+        </p:txBody>
+      </p:sp>
+      <p:sp>
+        <p:nvSpPr>
+          <p:cNvPr id="9" name="TextBox 8"/>
+          <p:cNvSpPr txBox="1"/>
+          <p:nvPr/>
+        </p:nvSpPr>
+        <p:spPr>
+          <a:xfrm>
+            <a:off x="640080" y="3529584"/>
+            <a:ext cx="5181447" cy="475488"/>
+          </a:xfrm>
+          <a:prstGeom prst="rect">
+            <a:avLst/>
+          </a:prstGeom>
+          <a:noFill/>
+        </p:spPr>
+        <p:txBody>
+          <a:bodyPr wrap="square" anchor="t" lIns="0" rIns="0" tIns="0" bIns="0">
+            <a:spAutoFit/>
+          </a:bodyPr>
+          <a:lstStyle/>
+          <a:p>
+            <a:pPr algn="l">
+              <a:lnSpc>
+                <a:spcPct val="125000"/>
+              </a:lnSpc>
+            </a:pPr>
+            <a:r>
+              <a:rPr sz="1250" b="0">
+                <a:solidFill>
+                  <a:srgbClr val="E7DFD2"/>
+                </a:solidFill>
+                <a:latin typeface="楷体"/>
+                <a:ea typeface="楷体"/>
+                <a:cs typeface="楷体"/>
+              </a:rPr>
+              <a:t>· (标尺)</a:t>
+            </a:r>
+          </a:p>
+        </p:txBody>
+      </p:sp>
+      <p:sp>
+        <p:nvSpPr>
+          <p:cNvPr id="10" name="TextBox 9"/>
+          <p:cNvSpPr txBox="1"/>
+          <p:nvPr/>
+        </p:nvSpPr>
+        <p:spPr>
+          <a:xfrm>
+            <a:off x="640080" y="4005072"/>
+            <a:ext cx="5181447" cy="475488"/>
+          </a:xfrm>
+          <a:prstGeom prst="rect">
+            <a:avLst/>
+          </a:prstGeom>
+          <a:noFill/>
+        </p:spPr>
+        <p:txBody>
+          <a:bodyPr wrap="square" anchor="t" lIns="0" rIns="0" tIns="0" bIns="0">
+            <a:spAutoFit/>
+          </a:bodyPr>
+          <a:lstStyle/>
+          <a:p>
+            <a:pPr algn="l">
+              <a:lnSpc>
+                <a:spcPct val="125000"/>
+              </a:lnSpc>
+            </a:pPr>
+            <a:r>
+              <a:rPr sz="1250" b="0">
+                <a:solidFill>
+                  <a:srgbClr val="E7DFD2"/>
+                </a:solidFill>
+                <a:latin typeface="楷体"/>
+                <a:ea typeface="楷体"/>
+                <a:cs typeface="楷体"/>
+              </a:rPr>
+              <a:t>· 驳五罪:</a:t>
+            </a:r>
+          </a:p>
+        </p:txBody>
+      </p:sp>
+      <p:sp>
+        <p:nvSpPr>
+          <p:cNvPr id="11" name="TextBox 10"/>
+          <p:cNvSpPr txBox="1"/>
+          <p:nvPr/>
+        </p:nvSpPr>
+        <p:spPr>
+          <a:xfrm>
+            <a:off x="6370167" y="2103120"/>
+            <a:ext cx="5181447" cy="475488"/>
+          </a:xfrm>
+          <a:prstGeom prst="rect">
+            <a:avLst/>
+          </a:prstGeom>
+          <a:noFill/>
+        </p:spPr>
+        <p:txBody>
+          <a:bodyPr wrap="square" anchor="t" lIns="0" rIns="0" tIns="0" bIns="0">
+            <a:spAutoFit/>
+          </a:bodyPr>
+          <a:lstStyle/>
+          <a:p>
+            <a:pPr algn="l">
+              <a:lnSpc>
+                <a:spcPct val="125000"/>
+              </a:lnSpc>
+            </a:pPr>
+            <a:r>
+              <a:rPr sz="1250" b="0">
+                <a:solidFill>
+                  <a:srgbClr val="E7DFD2"/>
+                </a:solidFill>
+                <a:latin typeface="楷体"/>
+                <a:ea typeface="楷体"/>
+                <a:cs typeface="楷体"/>
+              </a:rPr>
+              <a:t>· 侵官/生事/征利</a:t>
+            </a:r>
+          </a:p>
+        </p:txBody>
+      </p:sp>
+      <p:sp>
+        <p:nvSpPr>
+          <p:cNvPr id="12" name="TextBox 11"/>
+          <p:cNvSpPr txBox="1"/>
+          <p:nvPr/>
+        </p:nvSpPr>
+        <p:spPr>
+          <a:xfrm>
+            <a:off x="6370167" y="2578608"/>
+            <a:ext cx="5181447" cy="475488"/>
+          </a:xfrm>
+          <a:prstGeom prst="rect">
+            <a:avLst/>
+          </a:prstGeom>
+          <a:noFill/>
+        </p:spPr>
+        <p:txBody>
+          <a:bodyPr wrap="square" anchor="t" lIns="0" rIns="0" tIns="0" bIns="0">
+            <a:spAutoFit/>
+          </a:bodyPr>
+          <a:lstStyle/>
+          <a:p>
+            <a:pPr algn="l">
+              <a:lnSpc>
+                <a:spcPct val="125000"/>
+              </a:lnSpc>
+            </a:pPr>
+            <a:r>
+              <a:rPr sz="1250" b="0">
+                <a:solidFill>
+                  <a:srgbClr val="E7DFD2"/>
+                </a:solidFill>
+                <a:latin typeface="楷体"/>
+                <a:ea typeface="楷体"/>
+                <a:cs typeface="楷体"/>
+              </a:rPr>
+              <a:t>· 拒谏/致怨</a:t>
+            </a:r>
+          </a:p>
+        </p:txBody>
+      </p:sp>
+      <p:sp>
+        <p:nvSpPr>
+          <p:cNvPr id="13" name="TextBox 12"/>
+          <p:cNvSpPr txBox="1"/>
+          <p:nvPr/>
+        </p:nvSpPr>
+        <p:spPr>
+          <a:xfrm>
+            <a:off x="6370167" y="3054096"/>
+            <a:ext cx="5181447" cy="475488"/>
+          </a:xfrm>
+          <a:prstGeom prst="rect">
+            <a:avLst/>
+          </a:prstGeom>
+          <a:noFill/>
+        </p:spPr>
+        <p:txBody>
+          <a:bodyPr wrap="square" anchor="t" lIns="0" rIns="0" tIns="0" bIns="0">
+            <a:spAutoFit/>
+          </a:bodyPr>
+          <a:lstStyle/>
+          <a:p>
+            <a:pPr algn="l">
+              <a:lnSpc>
+                <a:spcPct val="125000"/>
+              </a:lnSpc>
+            </a:pPr>
+            <a:r>
+              <a:rPr sz="1250" b="0">
+                <a:solidFill>
+                  <a:srgbClr val="E7DFD2"/>
+                </a:solidFill>
+                <a:latin typeface="楷体"/>
+                <a:ea typeface="楷体"/>
+                <a:cs typeface="楷体"/>
+              </a:rPr>
+              <a:t>· 逐条破(用尺量)</a:t>
+            </a:r>
+          </a:p>
+        </p:txBody>
+      </p:sp>
+      <p:sp>
+        <p:nvSpPr>
+          <p:cNvPr id="14" name="TextBox 13"/>
+          <p:cNvSpPr txBox="1"/>
+          <p:nvPr/>
+        </p:nvSpPr>
+        <p:spPr>
+          <a:xfrm>
+            <a:off x="6370167" y="3529584"/>
+            <a:ext cx="5181447" cy="475488"/>
+          </a:xfrm>
+          <a:prstGeom prst="rect">
+            <a:avLst/>
+          </a:prstGeom>
+          <a:noFill/>
+        </p:spPr>
+        <p:txBody>
+          <a:bodyPr wrap="square" anchor="t" lIns="0" rIns="0" tIns="0" bIns="0">
+            <a:spAutoFit/>
+          </a:bodyPr>
+          <a:lstStyle/>
+          <a:p>
+            <a:pPr algn="l">
+              <a:lnSpc>
+                <a:spcPct val="125000"/>
+              </a:lnSpc>
+            </a:pPr>
+            <a:r>
+              <a:rPr sz="1250" b="0">
+                <a:solidFill>
+                  <a:srgbClr val="E7DFD2"/>
+                </a:solidFill>
+                <a:latin typeface="楷体"/>
+                <a:ea typeface="楷体"/>
+                <a:cs typeface="楷体"/>
+              </a:rPr>
+              <a:t>· 立场:为天下</a:t>
+            </a:r>
+          </a:p>
+        </p:txBody>
+      </p:sp>
+      <p:sp>
+        <p:nvSpPr>
+          <p:cNvPr id="15" name="TextBox 14"/>
+          <p:cNvSpPr txBox="1"/>
+          <p:nvPr/>
+        </p:nvSpPr>
+        <p:spPr>
+          <a:xfrm>
+            <a:off x="11002975" y="6355080"/>
+            <a:ext cx="731520" cy="320040"/>
+          </a:xfrm>
+          <a:prstGeom prst="rect">
+            <a:avLst/>
+          </a:prstGeom>
+          <a:noFill/>
+        </p:spPr>
+        <p:txBody>
+          <a:bodyPr wrap="square" anchor="t" lIns="0" rIns="0" tIns="0" bIns="0">
+            <a:spAutoFit/>
+          </a:bodyPr>
+          <a:lstStyle/>
+          <a:p>
             <a:pPr algn="r"/>
             <a:r>
               <a:rPr sz="1100" b="0">
                 <a:solidFill>
-                  <a:srgbClr val="6B6258"/>
+                  <a:srgbClr val="FFFFFF"/>
                 </a:solidFill>
                 <a:latin typeface="微软雅黑"/>
                 <a:ea typeface="微软雅黑"/>
@@ -7680,13 +8175,13 @@
             <a:r>
               <a:rPr sz="1300" b="1">
                 <a:solidFill>
-                  <a:srgbClr val="2E7D6B"/>
+                  <a:srgbClr val="B23A2A"/>
                 </a:solidFill>
                 <a:latin typeface="微软雅黑"/>
                 <a:ea typeface="微软雅黑"/>
                 <a:cs typeface="微软雅黑"/>
               </a:rPr>
-              <a:t>分层作业</a:t>
+              <a:t>作业</a:t>
             </a:r>
           </a:p>
         </p:txBody>
@@ -7706,7 +8201,7 @@
             <a:avLst/>
           </a:prstGeom>
           <a:solidFill>
-            <a:srgbClr val="2E7D6B"/>
+            <a:srgbClr val="B23A2A"/>
           </a:solidFill>
           <a:ln>
             <a:noFill/>
@@ -7737,14 +8232,219 @@
       </p:sp>
       <p:sp>
         <p:nvSpPr>
-          <p:cNvPr id="5" name="Rounded Rectangle 4"/>
+          <p:cNvPr id="5" name="TextBox 4"/>
+          <p:cNvSpPr txBox="1"/>
+          <p:nvPr/>
+        </p:nvSpPr>
+        <p:spPr>
+          <a:xfrm>
+            <a:off x="640080" y="1325880"/>
+            <a:ext cx="10911535" cy="548640"/>
+          </a:xfrm>
+          <a:prstGeom prst="rect">
+            <a:avLst/>
+          </a:prstGeom>
+          <a:noFill/>
+        </p:spPr>
+        <p:txBody>
+          <a:bodyPr wrap="square" anchor="t" lIns="0" rIns="0" tIns="0" bIns="0">
+            <a:spAutoFit/>
+          </a:bodyPr>
+          <a:lstStyle/>
+          <a:p>
+            <a:pPr algn="l"/>
+            <a:r>
+              <a:rPr sz="2800" b="1">
+                <a:solidFill>
+                  <a:srgbClr val="1C2A33"/>
+                </a:solidFill>
+                <a:latin typeface="楷体"/>
+                <a:ea typeface="楷体"/>
+                <a:cs typeface="楷体"/>
+              </a:rPr>
+              <a:t>分层作业</a:t>
+            </a:r>
+          </a:p>
+        </p:txBody>
+      </p:sp>
+      <p:sp>
+        <p:nvSpPr>
+          <p:cNvPr id="6" name="Rounded Rectangle 5"/>
           <p:cNvSpPr/>
           <p:nvPr/>
         </p:nvSpPr>
         <p:spPr>
           <a:xfrm>
-            <a:off x="640080" y="1417320"/>
-            <a:ext cx="10911535" cy="1417320"/>
+            <a:off x="640080" y="2194560"/>
+            <a:ext cx="5272887" cy="3931920"/>
+          </a:xfrm>
+          <a:prstGeom prst="roundRect">
+            <a:avLst/>
+          </a:prstGeom>
+          <a:solidFill>
+            <a:srgbClr val="FFFFFF"/>
+          </a:solidFill>
+          <a:ln w="22860">
+            <a:solidFill>
+              <a:srgbClr val="B23A2A"/>
+            </a:solidFill>
+          </a:ln>
+          <a:effectLst/>
+        </p:spPr>
+        <p:style>
+          <a:lnRef idx="1">
+            <a:schemeClr val="accent1"/>
+          </a:lnRef>
+          <a:fillRef idx="3">
+            <a:schemeClr val="accent1"/>
+          </a:fillRef>
+          <a:effectRef idx="2">
+            <a:schemeClr val="accent1"/>
+          </a:effectRef>
+          <a:fontRef idx="minor">
+            <a:schemeClr val="lt1"/>
+          </a:fontRef>
+        </p:style>
+        <p:txBody>
+          <a:bodyPr rtlCol="0" anchor="ctr"/>
+          <a:lstStyle/>
+          <a:p>
+            <a:pPr algn="ctr"/>
+          </a:p>
+        </p:txBody>
+      </p:sp>
+      <p:sp>
+        <p:nvSpPr>
+          <p:cNvPr id="7" name="Rectangle 6"/>
+          <p:cNvSpPr/>
+          <p:nvPr/>
+        </p:nvSpPr>
+        <p:spPr>
+          <a:xfrm>
+            <a:off x="640080" y="2194560"/>
+            <a:ext cx="5272887" cy="548640"/>
+          </a:xfrm>
+          <a:prstGeom prst="rect">
+            <a:avLst/>
+          </a:prstGeom>
+          <a:solidFill>
+            <a:srgbClr val="B23A2A"/>
+          </a:solidFill>
+          <a:ln>
+            <a:noFill/>
+          </a:ln>
+          <a:effectLst/>
+        </p:spPr>
+        <p:style>
+          <a:lnRef idx="1">
+            <a:schemeClr val="accent1"/>
+          </a:lnRef>
+          <a:fillRef idx="3">
+            <a:schemeClr val="accent1"/>
+          </a:fillRef>
+          <a:effectRef idx="2">
+            <a:schemeClr val="accent1"/>
+          </a:effectRef>
+          <a:fontRef idx="minor">
+            <a:schemeClr val="lt1"/>
+          </a:fontRef>
+        </p:style>
+        <p:txBody>
+          <a:bodyPr rtlCol="0" anchor="ctr"/>
+          <a:lstStyle/>
+          <a:p>
+            <a:pPr algn="ctr"/>
+          </a:p>
+        </p:txBody>
+      </p:sp>
+      <p:sp>
+        <p:nvSpPr>
+          <p:cNvPr id="8" name="TextBox 7"/>
+          <p:cNvSpPr txBox="1"/>
+          <p:nvPr/>
+        </p:nvSpPr>
+        <p:spPr>
+          <a:xfrm>
+            <a:off x="640080" y="2304288"/>
+            <a:ext cx="5272887" cy="365760"/>
+          </a:xfrm>
+          <a:prstGeom prst="rect">
+            <a:avLst/>
+          </a:prstGeom>
+          <a:noFill/>
+        </p:spPr>
+        <p:txBody>
+          <a:bodyPr wrap="square" anchor="t" lIns="0" rIns="0" tIns="0" bIns="0">
+            <a:spAutoFit/>
+          </a:bodyPr>
+          <a:lstStyle/>
+          <a:p>
+            <a:pPr algn="ctr"/>
+            <a:r>
+              <a:rPr sz="1600" b="1">
+                <a:solidFill>
+                  <a:srgbClr val="FFFFFF"/>
+                </a:solidFill>
+                <a:latin typeface="微软雅黑"/>
+                <a:ea typeface="微软雅黑"/>
+                <a:cs typeface="微软雅黑"/>
+              </a:rPr>
+              <a:t>基础作业</a:t>
+            </a:r>
+          </a:p>
+        </p:txBody>
+      </p:sp>
+      <p:sp>
+        <p:nvSpPr>
+          <p:cNvPr id="9" name="TextBox 8"/>
+          <p:cNvSpPr txBox="1"/>
+          <p:nvPr/>
+        </p:nvSpPr>
+        <p:spPr>
+          <a:xfrm>
+            <a:off x="914400" y="2971800"/>
+            <a:ext cx="4724247" cy="3017520"/>
+          </a:xfrm>
+          <a:prstGeom prst="rect">
+            <a:avLst/>
+          </a:prstGeom>
+          <a:noFill/>
+        </p:spPr>
+        <p:txBody>
+          <a:bodyPr wrap="square" anchor="t" lIns="0" rIns="0" tIns="0" bIns="0">
+            <a:spAutoFit/>
+          </a:bodyPr>
+          <a:lstStyle/>
+          <a:p>
+            <a:pPr algn="l">
+              <a:lnSpc>
+                <a:spcPct val="150000"/>
+              </a:lnSpc>
+            </a:pPr>
+            <a:r>
+              <a:rPr sz="1350" b="0">
+                <a:solidFill>
+                  <a:srgbClr val="1C2A33"/>
+                </a:solidFill>
+                <a:latin typeface="楷体"/>
+                <a:ea typeface="楷体"/>
+                <a:cs typeface="楷体"/>
+              </a:rPr>
+              <a:t>1. 写出文中的驳论原则。2. 说出被驳的「五罪」中任两个。</a:t>
+            </a:r>
+          </a:p>
+        </p:txBody>
+      </p:sp>
+      <p:sp>
+        <p:nvSpPr>
+          <p:cNvPr id="10" name="Rounded Rectangle 9"/>
+          <p:cNvSpPr/>
+          <p:nvPr/>
+        </p:nvSpPr>
+        <p:spPr>
+          <a:xfrm>
+            <a:off x="6278727" y="2194560"/>
+            <a:ext cx="5272887" cy="3931920"/>
           </a:xfrm>
           <a:prstGeom prst="roundRect">
             <a:avLst/>
@@ -7783,107 +8483,23 @@
       </p:sp>
       <p:sp>
         <p:nvSpPr>
-          <p:cNvPr id="6" name="TextBox 5"/>
-          <p:cNvSpPr txBox="1"/>
-          <p:nvPr/>
-        </p:nvSpPr>
-        <p:spPr>
-          <a:xfrm>
-            <a:off x="1371600" y="1527048"/>
-            <a:ext cx="9997135" cy="457200"/>
-          </a:xfrm>
-          <a:prstGeom prst="rect">
-            <a:avLst/>
-          </a:prstGeom>
-          <a:noFill/>
-        </p:spPr>
-        <p:txBody>
-          <a:bodyPr wrap="square" anchor="t" lIns="0" rIns="0" tIns="0" bIns="0">
-            <a:spAutoFit/>
-          </a:bodyPr>
-          <a:lstStyle/>
-          <a:p>
-            <a:pPr algn="l">
-              <a:lnSpc>
-                <a:spcPct val="110000"/>
-              </a:lnSpc>
-            </a:pPr>
-            <a:r>
-              <a:rPr sz="1600" b="1">
-                <a:solidFill>
-                  <a:srgbClr val="1C2A33"/>
-                </a:solidFill>
-                <a:latin typeface="微软雅黑"/>
-                <a:ea typeface="微软雅黑"/>
-                <a:cs typeface="微软雅黑"/>
-              </a:rPr>
-              <a:t/>
-            </a:r>
-          </a:p>
-        </p:txBody>
-      </p:sp>
-      <p:sp>
-        <p:nvSpPr>
-          <p:cNvPr id="7" name="TextBox 6"/>
-          <p:cNvSpPr txBox="1"/>
-          <p:nvPr/>
-        </p:nvSpPr>
-        <p:spPr>
-          <a:xfrm>
-            <a:off x="1371600" y="1965960"/>
-            <a:ext cx="9997135" cy="777240"/>
-          </a:xfrm>
-          <a:prstGeom prst="rect">
-            <a:avLst/>
-          </a:prstGeom>
-          <a:noFill/>
-        </p:spPr>
-        <p:txBody>
-          <a:bodyPr wrap="square" anchor="t" lIns="0" rIns="0" tIns="0" bIns="0">
-            <a:spAutoFit/>
-          </a:bodyPr>
-          <a:lstStyle/>
-          <a:p>
-            <a:pPr algn="l">
-              <a:lnSpc>
-                <a:spcPct val="128000"/>
-              </a:lnSpc>
-            </a:pPr>
-            <a:r>
-              <a:rPr sz="1400" b="0">
-                <a:solidFill>
-                  <a:srgbClr val="1C2A33"/>
-                </a:solidFill>
-                <a:latin typeface="楷体"/>
-                <a:ea typeface="楷体"/>
-                <a:cs typeface="楷体"/>
-              </a:rPr>
-              <a:t>【基础作业】1. 写出文中的驳论原则。2. 说出被驳的「五罪」中任两个。</a:t>
-            </a:r>
-          </a:p>
-        </p:txBody>
-      </p:sp>
-      <p:sp>
-        <p:nvSpPr>
-          <p:cNvPr id="8" name="Rounded Rectangle 7"/>
+          <p:cNvPr id="11" name="Rectangle 10"/>
           <p:cNvSpPr/>
           <p:nvPr/>
         </p:nvSpPr>
         <p:spPr>
           <a:xfrm>
-            <a:off x="640080" y="2971800"/>
-            <a:ext cx="10911535" cy="1417320"/>
-          </a:xfrm>
-          <a:prstGeom prst="roundRect">
+            <a:off x="6278727" y="2194560"/>
+            <a:ext cx="5272887" cy="548640"/>
+          </a:xfrm>
+          <a:prstGeom prst="rect">
             <a:avLst/>
           </a:prstGeom>
           <a:solidFill>
-            <a:srgbClr val="FFFFFF"/>
+            <a:srgbClr val="2E7D6B"/>
           </a:solidFill>
-          <a:ln w="22860">
-            <a:solidFill>
-              <a:srgbClr val="2E7D6B"/>
-            </a:solidFill>
+          <a:ln>
+            <a:noFill/>
           </a:ln>
           <a:effectLst/>
         </p:spPr>
@@ -7911,14 +8527,14 @@
       </p:sp>
       <p:sp>
         <p:nvSpPr>
-          <p:cNvPr id="9" name="TextBox 8"/>
+          <p:cNvPr id="12" name="TextBox 11"/>
           <p:cNvSpPr txBox="1"/>
           <p:nvPr/>
         </p:nvSpPr>
         <p:spPr>
           <a:xfrm>
-            <a:off x="1371600" y="3081528"/>
-            <a:ext cx="9997135" cy="457200"/>
+            <a:off x="6278727" y="2304288"/>
+            <a:ext cx="5272887" cy="365760"/>
           </a:xfrm>
           <a:prstGeom prst="rect">
             <a:avLst/>
@@ -7931,35 +8547,31 @@
           </a:bodyPr>
           <a:lstStyle/>
           <a:p>
-            <a:pPr algn="l">
-              <a:lnSpc>
-                <a:spcPct val="110000"/>
-              </a:lnSpc>
-            </a:pPr>
+            <a:pPr algn="ctr"/>
             <a:r>
               <a:rPr sz="1600" b="1">
                 <a:solidFill>
-                  <a:srgbClr val="1C2A33"/>
+                  <a:srgbClr val="FFFFFF"/>
                 </a:solidFill>
                 <a:latin typeface="微软雅黑"/>
                 <a:ea typeface="微软雅黑"/>
                 <a:cs typeface="微软雅黑"/>
               </a:rPr>
-              <a:t/>
-            </a:r>
-          </a:p>
-        </p:txBody>
-      </p:sp>
-      <p:sp>
-        <p:nvSpPr>
-          <p:cNvPr id="10" name="TextBox 9"/>
+              <a:t>提高作业</a:t>
+            </a:r>
+          </a:p>
+        </p:txBody>
+      </p:sp>
+      <p:sp>
+        <p:nvSpPr>
+          <p:cNvPr id="13" name="TextBox 12"/>
           <p:cNvSpPr txBox="1"/>
           <p:nvPr/>
         </p:nvSpPr>
         <p:spPr>
           <a:xfrm>
-            <a:off x="1371600" y="3520440"/>
-            <a:ext cx="9997135" cy="777240"/>
+            <a:off x="6553047" y="2971800"/>
+            <a:ext cx="4724247" cy="3017520"/>
           </a:xfrm>
           <a:prstGeom prst="rect">
             <a:avLst/>
@@ -7974,11 +8586,11 @@
           <a:p>
             <a:pPr algn="l">
               <a:lnSpc>
-                <a:spcPct val="128000"/>
+                <a:spcPct val="150000"/>
               </a:lnSpc>
             </a:pPr>
             <a:r>
-              <a:rPr sz="1200" b="0">
+              <a:rPr sz="1350" b="0">
                 <a:solidFill>
                   <a:srgbClr val="1C2A33"/>
                 </a:solidFill>
@@ -7986,14 +8598,14 @@
                 <a:ea typeface="楷体"/>
                 <a:cs typeface="楷体"/>
               </a:rPr>
-              <a:t>【提高作业】写150字「我眼中的王安石」，要求：①联驳论一处；②说立场；③不脸谱。</a:t>
-            </a:r>
-          </a:p>
-        </p:txBody>
-      </p:sp>
-      <p:sp>
-        <p:nvSpPr>
-          <p:cNvPr id="11" name="TextBox 10"/>
+              <a:t>写150字「我眼中的王安石」，要求：①联驳论一处；②说立场；③不脸谱。</a:t>
+            </a:r>
+          </a:p>
+        </p:txBody>
+      </p:sp>
+      <p:sp>
+        <p:nvSpPr>
+          <p:cNvPr id="14" name="TextBox 13"/>
           <p:cNvSpPr txBox="1"/>
           <p:nvPr/>
         </p:nvSpPr>
@@ -8120,13 +8732,13 @@
             <a:r>
               <a:rPr sz="1300" b="1">
                 <a:solidFill>
-                  <a:srgbClr val="C8A86B"/>
+                  <a:srgbClr val="B23A2A"/>
                 </a:solidFill>
                 <a:latin typeface="微软雅黑"/>
                 <a:ea typeface="微软雅黑"/>
                 <a:cs typeface="微软雅黑"/>
               </a:rPr>
-              <a:t>本课小结</a:t>
+              <a:t>单元小结</a:t>
             </a:r>
           </a:p>
         </p:txBody>
@@ -8146,7 +8758,7 @@
             <a:avLst/>
           </a:prstGeom>
           <a:solidFill>
-            <a:srgbClr val="C8A86B"/>
+            <a:srgbClr val="B23A2A"/>
           </a:solidFill>
           <a:ln>
             <a:noFill/>
@@ -8177,23 +8789,62 @@
       </p:sp>
       <p:sp>
         <p:nvSpPr>
-          <p:cNvPr id="5" name="Rectangle 4"/>
+          <p:cNvPr id="5" name="TextBox 4"/>
+          <p:cNvSpPr txBox="1"/>
+          <p:nvPr/>
+        </p:nvSpPr>
+        <p:spPr>
+          <a:xfrm>
+            <a:off x="640080" y="1325880"/>
+            <a:ext cx="10911535" cy="548640"/>
+          </a:xfrm>
+          <a:prstGeom prst="rect">
+            <a:avLst/>
+          </a:prstGeom>
+          <a:noFill/>
+        </p:spPr>
+        <p:txBody>
+          <a:bodyPr wrap="square" anchor="t" lIns="0" rIns="0" tIns="0" bIns="0">
+            <a:spAutoFit/>
+          </a:bodyPr>
+          <a:lstStyle/>
+          <a:p>
+            <a:pPr algn="l"/>
+            <a:r>
+              <a:rPr sz="2600" b="1">
+                <a:solidFill>
+                  <a:srgbClr val="1C2A33"/>
+                </a:solidFill>
+                <a:latin typeface="楷体"/>
+                <a:ea typeface="楷体"/>
+                <a:cs typeface="楷体"/>
+              </a:rPr>
+              <a:t>回望 · 第8单元</a:t>
+            </a:r>
+          </a:p>
+        </p:txBody>
+      </p:sp>
+      <p:sp>
+        <p:nvSpPr>
+          <p:cNvPr id="6" name="Rounded Rectangle 5"/>
           <p:cNvSpPr/>
           <p:nvPr/>
         </p:nvSpPr>
         <p:spPr>
           <a:xfrm>
-            <a:off x="640080" y="1737360"/>
-            <a:ext cx="54864" cy="431800"/>
-          </a:xfrm>
-          <a:prstGeom prst="rect">
+            <a:off x="640080" y="2057400"/>
+            <a:ext cx="10911535" cy="731520"/>
+          </a:xfrm>
+          <a:prstGeom prst="roundRect">
             <a:avLst/>
           </a:prstGeom>
           <a:solidFill>
-            <a:srgbClr val="C8A86B"/>
+            <a:srgbClr val="1C2A33"/>
           </a:solidFill>
-          <a:ln>
-            <a:noFill/>
+          <a:ln w="22860">
+            <a:solidFill>
+              <a:srgbClr val="C8A86B"/>
+            </a:solidFill>
           </a:ln>
           <a:effectLst/>
         </p:spPr>
@@ -8221,14 +8872,134 @@
       </p:sp>
       <p:sp>
         <p:nvSpPr>
-          <p:cNvPr id="6" name="TextBox 5"/>
+          <p:cNvPr id="7" name="TextBox 6"/>
           <p:cNvSpPr txBox="1"/>
           <p:nvPr/>
         </p:nvSpPr>
         <p:spPr>
           <a:xfrm>
-            <a:off x="868680" y="1645920"/>
-            <a:ext cx="10682935" cy="2194560"/>
+            <a:off x="914400" y="2121408"/>
+            <a:ext cx="10362895" cy="603504"/>
+          </a:xfrm>
+          <a:prstGeom prst="rect">
+            <a:avLst/>
+          </a:prstGeom>
+          <a:noFill/>
+        </p:spPr>
+        <p:txBody>
+          <a:bodyPr wrap="square" anchor="t" lIns="0" rIns="0" tIns="0" bIns="0">
+            <a:spAutoFit/>
+          </a:bodyPr>
+          <a:lstStyle/>
+          <a:p>
+            <a:pPr algn="ctr"/>
+            <a:r>
+              <a:rPr sz="1800" b="1">
+                <a:solidFill>
+                  <a:srgbClr val="FFFFFF"/>
+                </a:solidFill>
+                <a:latin typeface="楷体"/>
+                <a:ea typeface="楷体"/>
+                <a:cs typeface="楷体"/>
+              </a:rPr>
+              <a:t>思辨性阅读与表达（古代说理文）</a:t>
+            </a:r>
+          </a:p>
+        </p:txBody>
+      </p:sp>
+      <p:sp>
+        <p:nvSpPr>
+          <p:cNvPr id="8" name="Rounded Rectangle 7"/>
+          <p:cNvSpPr/>
+          <p:nvPr/>
+        </p:nvSpPr>
+        <p:spPr>
+          <a:xfrm>
+            <a:off x="640080" y="3017520"/>
+            <a:ext cx="3393338" cy="3291840"/>
+          </a:xfrm>
+          <a:prstGeom prst="roundRect">
+            <a:avLst/>
+          </a:prstGeom>
+          <a:solidFill>
+            <a:srgbClr val="FFFFFF"/>
+          </a:solidFill>
+          <a:ln w="20320">
+            <a:solidFill>
+              <a:srgbClr val="B23A2A"/>
+            </a:solidFill>
+          </a:ln>
+          <a:effectLst/>
+        </p:spPr>
+        <p:style>
+          <a:lnRef idx="1">
+            <a:schemeClr val="accent1"/>
+          </a:lnRef>
+          <a:fillRef idx="3">
+            <a:schemeClr val="accent1"/>
+          </a:fillRef>
+          <a:effectRef idx="2">
+            <a:schemeClr val="accent1"/>
+          </a:effectRef>
+          <a:fontRef idx="minor">
+            <a:schemeClr val="lt1"/>
+          </a:fontRef>
+        </p:style>
+        <p:txBody>
+          <a:bodyPr rtlCol="0" anchor="ctr"/>
+          <a:lstStyle/>
+          <a:p>
+            <a:pPr algn="ctr"/>
+          </a:p>
+        </p:txBody>
+      </p:sp>
+      <p:sp>
+        <p:nvSpPr>
+          <p:cNvPr id="9" name="TextBox 8"/>
+          <p:cNvSpPr txBox="1"/>
+          <p:nvPr/>
+        </p:nvSpPr>
+        <p:spPr>
+          <a:xfrm>
+            <a:off x="868680" y="3246120"/>
+            <a:ext cx="2936138" cy="457200"/>
+          </a:xfrm>
+          <a:prstGeom prst="rect">
+            <a:avLst/>
+          </a:prstGeom>
+          <a:noFill/>
+        </p:spPr>
+        <p:txBody>
+          <a:bodyPr wrap="square" anchor="t" lIns="0" rIns="0" tIns="0" bIns="0">
+            <a:spAutoFit/>
+          </a:bodyPr>
+          <a:lstStyle/>
+          <a:p>
+            <a:pPr algn="l"/>
+            <a:r>
+              <a:rPr sz="1600" b="1">
+                <a:solidFill>
+                  <a:srgbClr val="B23A2A"/>
+                </a:solidFill>
+                <a:latin typeface="微软雅黑"/>
+                <a:ea typeface="微软雅黑"/>
+                <a:cs typeface="微软雅黑"/>
+              </a:rPr>
+              <a:t>我读到了什么</a:t>
+            </a:r>
+          </a:p>
+        </p:txBody>
+      </p:sp>
+      <p:sp>
+        <p:nvSpPr>
+          <p:cNvPr id="10" name="TextBox 9"/>
+          <p:cNvSpPr txBox="1"/>
+          <p:nvPr/>
+        </p:nvSpPr>
+        <p:spPr>
+          <a:xfrm>
+            <a:off x="868680" y="3840480"/>
+            <a:ext cx="2936138" cy="2331720"/>
           </a:xfrm>
           <a:prstGeom prst="rect">
             <a:avLst/>
@@ -8245,12 +9016,9 @@
               <a:lnSpc>
                 <a:spcPct val="150000"/>
               </a:lnSpc>
-              <a:spcAft>
-                <a:spcPts val="1000"/>
-              </a:spcAft>
             </a:pPr>
             <a:r>
-              <a:rPr sz="2200" b="0">
+              <a:rPr sz="1350" b="0">
                 <a:solidFill>
                   <a:srgbClr val="1C2A33"/>
                 </a:solidFill>
@@ -8258,28 +9026,262 @@
                 <a:ea typeface="楷体"/>
                 <a:cs typeface="楷体"/>
               </a:rPr>
-              <a:t>本单元主题：思辨性阅读与表达（古代说理文）。把今天学到的方法带进下一篇——自己读、自己想、自己写。</a:t>
-            </a:r>
-          </a:p>
+              <a:t>本单元围绕「思辨性阅读与表达（古代说理文）」展开；本课抓住：原则：名实相符（名与实须合）。。</a:t>
+            </a:r>
+          </a:p>
+        </p:txBody>
+      </p:sp>
+      <p:sp>
+        <p:nvSpPr>
+          <p:cNvPr id="11" name="Rounded Rectangle 10"/>
+          <p:cNvSpPr/>
+          <p:nvPr/>
+        </p:nvSpPr>
+        <p:spPr>
+          <a:xfrm>
+            <a:off x="4399178" y="3017520"/>
+            <a:ext cx="3393338" cy="3291840"/>
+          </a:xfrm>
+          <a:prstGeom prst="roundRect">
+            <a:avLst/>
+          </a:prstGeom>
+          <a:solidFill>
+            <a:srgbClr val="FFFFFF"/>
+          </a:solidFill>
+          <a:ln w="20320">
+            <a:solidFill>
+              <a:srgbClr val="2E7D6B"/>
+            </a:solidFill>
+          </a:ln>
+          <a:effectLst/>
+        </p:spPr>
+        <p:style>
+          <a:lnRef idx="1">
+            <a:schemeClr val="accent1"/>
+          </a:lnRef>
+          <a:fillRef idx="3">
+            <a:schemeClr val="accent1"/>
+          </a:fillRef>
+          <a:effectRef idx="2">
+            <a:schemeClr val="accent1"/>
+          </a:effectRef>
+          <a:fontRef idx="minor">
+            <a:schemeClr val="lt1"/>
+          </a:fontRef>
+        </p:style>
+        <p:txBody>
+          <a:bodyPr rtlCol="0" anchor="ctr"/>
+          <a:lstStyle/>
+          <a:p>
+            <a:pPr algn="ctr"/>
+          </a:p>
+        </p:txBody>
+      </p:sp>
+      <p:sp>
+        <p:nvSpPr>
+          <p:cNvPr id="12" name="TextBox 11"/>
+          <p:cNvSpPr txBox="1"/>
+          <p:nvPr/>
+        </p:nvSpPr>
+        <p:spPr>
+          <a:xfrm>
+            <a:off x="4627778" y="3246120"/>
+            <a:ext cx="2936138" cy="457200"/>
+          </a:xfrm>
+          <a:prstGeom prst="rect">
+            <a:avLst/>
+          </a:prstGeom>
+          <a:noFill/>
+        </p:spPr>
+        <p:txBody>
+          <a:bodyPr wrap="square" anchor="t" lIns="0" rIns="0" tIns="0" bIns="0">
+            <a:spAutoFit/>
+          </a:bodyPr>
+          <a:lstStyle/>
           <a:p>
             <a:pPr algn="l"/>
             <a:r>
               <a:rPr sz="1600" b="1">
                 <a:solidFill>
-                  <a:srgbClr val="B23A2A"/>
+                  <a:srgbClr val="2E7D6B"/>
                 </a:solidFill>
                 <a:latin typeface="微软雅黑"/>
                 <a:ea typeface="微软雅黑"/>
                 <a:cs typeface="微软雅黑"/>
               </a:rPr>
-              <a:t>方法迁移：圈关键信息 → 理事件脉络 → 析人物精神</a:t>
-            </a:r>
-          </a:p>
-        </p:txBody>
-      </p:sp>
-      <p:sp>
-        <p:nvSpPr>
-          <p:cNvPr id="7" name="TextBox 6"/>
+              <a:t>我留下什么疑问</a:t>
+            </a:r>
+          </a:p>
+        </p:txBody>
+      </p:sp>
+      <p:sp>
+        <p:nvSpPr>
+          <p:cNvPr id="13" name="TextBox 12"/>
+          <p:cNvSpPr txBox="1"/>
+          <p:nvPr/>
+        </p:nvSpPr>
+        <p:spPr>
+          <a:xfrm>
+            <a:off x="4627778" y="3840480"/>
+            <a:ext cx="2936138" cy="2331720"/>
+          </a:xfrm>
+          <a:prstGeom prst="rect">
+            <a:avLst/>
+          </a:prstGeom>
+          <a:noFill/>
+        </p:spPr>
+        <p:txBody>
+          <a:bodyPr wrap="square" anchor="t" lIns="0" rIns="0" tIns="0" bIns="0">
+            <a:spAutoFit/>
+          </a:bodyPr>
+          <a:lstStyle/>
+          <a:p>
+            <a:pPr algn="l">
+              <a:lnSpc>
+                <a:spcPct val="150000"/>
+              </a:lnSpc>
+            </a:pPr>
+            <a:r>
+              <a:rPr sz="1350" b="0">
+                <a:solidFill>
+                  <a:srgbClr val="1C2A33"/>
+                </a:solidFill>
+                <a:latin typeface="楷体"/>
+                <a:ea typeface="楷体"/>
+                <a:cs typeface="楷体"/>
+              </a:rPr>
+              <a:t>哪一处最想再细读？写下你的一个问题，带着它走向课外阅读。</a:t>
+            </a:r>
+          </a:p>
+        </p:txBody>
+      </p:sp>
+      <p:sp>
+        <p:nvSpPr>
+          <p:cNvPr id="14" name="Rounded Rectangle 13"/>
+          <p:cNvSpPr/>
+          <p:nvPr/>
+        </p:nvSpPr>
+        <p:spPr>
+          <a:xfrm>
+            <a:off x="8158276" y="3017520"/>
+            <a:ext cx="3393338" cy="3291840"/>
+          </a:xfrm>
+          <a:prstGeom prst="roundRect">
+            <a:avLst/>
+          </a:prstGeom>
+          <a:solidFill>
+            <a:srgbClr val="FFFFFF"/>
+          </a:solidFill>
+          <a:ln w="20320">
+            <a:solidFill>
+              <a:srgbClr val="C8A86B"/>
+            </a:solidFill>
+          </a:ln>
+          <a:effectLst/>
+        </p:spPr>
+        <p:style>
+          <a:lnRef idx="1">
+            <a:schemeClr val="accent1"/>
+          </a:lnRef>
+          <a:fillRef idx="3">
+            <a:schemeClr val="accent1"/>
+          </a:fillRef>
+          <a:effectRef idx="2">
+            <a:schemeClr val="accent1"/>
+          </a:effectRef>
+          <a:fontRef idx="minor">
+            <a:schemeClr val="lt1"/>
+          </a:fontRef>
+        </p:style>
+        <p:txBody>
+          <a:bodyPr rtlCol="0" anchor="ctr"/>
+          <a:lstStyle/>
+          <a:p>
+            <a:pPr algn="ctr"/>
+          </a:p>
+        </p:txBody>
+      </p:sp>
+      <p:sp>
+        <p:nvSpPr>
+          <p:cNvPr id="15" name="TextBox 14"/>
+          <p:cNvSpPr txBox="1"/>
+          <p:nvPr/>
+        </p:nvSpPr>
+        <p:spPr>
+          <a:xfrm>
+            <a:off x="8386876" y="3246120"/>
+            <a:ext cx="2936138" cy="457200"/>
+          </a:xfrm>
+          <a:prstGeom prst="rect">
+            <a:avLst/>
+          </a:prstGeom>
+          <a:noFill/>
+        </p:spPr>
+        <p:txBody>
+          <a:bodyPr wrap="square" anchor="t" lIns="0" rIns="0" tIns="0" bIns="0">
+            <a:spAutoFit/>
+          </a:bodyPr>
+          <a:lstStyle/>
+          <a:p>
+            <a:pPr algn="l"/>
+            <a:r>
+              <a:rPr sz="1600" b="1">
+                <a:solidFill>
+                  <a:srgbClr val="C8A86B"/>
+                </a:solidFill>
+                <a:latin typeface="微软雅黑"/>
+                <a:ea typeface="微软雅黑"/>
+                <a:cs typeface="微软雅黑"/>
+              </a:rPr>
+              <a:t>我怎样去运用</a:t>
+            </a:r>
+          </a:p>
+        </p:txBody>
+      </p:sp>
+      <p:sp>
+        <p:nvSpPr>
+          <p:cNvPr id="16" name="TextBox 15"/>
+          <p:cNvSpPr txBox="1"/>
+          <p:nvPr/>
+        </p:nvSpPr>
+        <p:spPr>
+          <a:xfrm>
+            <a:off x="8386876" y="3840480"/>
+            <a:ext cx="2936138" cy="2331720"/>
+          </a:xfrm>
+          <a:prstGeom prst="rect">
+            <a:avLst/>
+          </a:prstGeom>
+          <a:noFill/>
+        </p:spPr>
+        <p:txBody>
+          <a:bodyPr wrap="square" anchor="t" lIns="0" rIns="0" tIns="0" bIns="0">
+            <a:spAutoFit/>
+          </a:bodyPr>
+          <a:lstStyle/>
+          <a:p>
+            <a:pPr algn="l">
+              <a:lnSpc>
+                <a:spcPct val="150000"/>
+              </a:lnSpc>
+            </a:pPr>
+            <a:r>
+              <a:rPr sz="1350" b="0">
+                <a:solidFill>
+                  <a:srgbClr val="1C2A33"/>
+                </a:solidFill>
+                <a:latin typeface="楷体"/>
+                <a:ea typeface="楷体"/>
+                <a:cs typeface="楷体"/>
+              </a:rPr>
+              <a:t>把「原则标尺法（名实）。」用到一部剧或一篇科普的观赏与阅读中。</a:t>
+            </a:r>
+          </a:p>
+        </p:txBody>
+      </p:sp>
+      <p:sp>
+        <p:nvSpPr>
+          <p:cNvPr id="17" name="TextBox 16"/>
           <p:cNvSpPr txBox="1"/>
           <p:nvPr/>
         </p:nvSpPr>
